--- a/docs/pptx/whole/ritu-linsubhr-disc-akikdigo.pptx
+++ b/docs/pptx/whole/ritu-linsubhr-disc-akikdigo.pptx
@@ -2443,7 +2443,7 @@
           </p:nvSpPr>
           <p:spPr>
             <a:xfrm>
-              <a:off x="1942521" y="2073503"/>
+              <a:off x="1943067" y="2073503"/>
               <a:ext cx="0" cy="3649639"/>
             </a:xfrm>
             <a:custGeom>
@@ -2486,7 +2486,7 @@
           </p:nvSpPr>
           <p:spPr>
             <a:xfrm>
-              <a:off x="4460699" y="2073503"/>
+              <a:off x="4460487" y="2073503"/>
               <a:ext cx="0" cy="3649639"/>
             </a:xfrm>
             <a:custGeom>
@@ -2529,7 +2529,7 @@
           </p:nvSpPr>
           <p:spPr>
             <a:xfrm>
-              <a:off x="6978877" y="2073503"/>
+              <a:off x="6977907" y="2073503"/>
               <a:ext cx="0" cy="3649639"/>
             </a:xfrm>
             <a:custGeom>
@@ -2787,7 +2787,7 @@
           </p:nvSpPr>
           <p:spPr>
             <a:xfrm>
-              <a:off x="3201610" y="2073503"/>
+              <a:off x="3201777" y="2073503"/>
               <a:ext cx="0" cy="3649639"/>
             </a:xfrm>
             <a:custGeom>
@@ -2830,7 +2830,7 @@
           </p:nvSpPr>
           <p:spPr>
             <a:xfrm>
-              <a:off x="5719788" y="2073503"/>
+              <a:off x="5719197" y="2073503"/>
               <a:ext cx="0" cy="3649639"/>
             </a:xfrm>
             <a:custGeom>
@@ -2873,7 +2873,7 @@
           </p:nvSpPr>
           <p:spPr>
             <a:xfrm>
-              <a:off x="8237966" y="2073503"/>
+              <a:off x="8236616" y="2073503"/>
               <a:ext cx="0" cy="3649639"/>
             </a:xfrm>
             <a:custGeom>
@@ -2917,536 +2917,536 @@
           <p:spPr>
             <a:xfrm>
               <a:off x="1172049" y="2073503"/>
-              <a:ext cx="7090630" cy="3249114"/>
+              <a:ext cx="7090630" cy="3246859"/>
             </a:xfrm>
             <a:custGeom>
               <a:avLst/>
               <a:pathLst>
-                <a:path w="7090630" h="3249114">
+                <a:path w="7090630" h="3246859">
                   <a:moveTo>
-                    <a:pt x="1794627" y="0"/>
+                    <a:pt x="1793137" y="0"/>
                   </a:moveTo>
                   <a:lnTo>
-                    <a:pt x="1862185" y="117969"/>
-                  </a:lnTo>
-                  <a:lnTo>
-                    <a:pt x="1933808" y="238556"/>
-                  </a:lnTo>
-                  <a:lnTo>
-                    <a:pt x="2005430" y="354822"/>
-                  </a:lnTo>
-                  <a:lnTo>
-                    <a:pt x="2077053" y="466923"/>
-                  </a:lnTo>
-                  <a:lnTo>
-                    <a:pt x="2148675" y="575007"/>
-                  </a:lnTo>
-                  <a:lnTo>
-                    <a:pt x="2220298" y="679220"/>
-                  </a:lnTo>
-                  <a:lnTo>
-                    <a:pt x="2291920" y="779698"/>
-                  </a:lnTo>
-                  <a:lnTo>
-                    <a:pt x="2363543" y="876577"/>
-                  </a:lnTo>
-                  <a:lnTo>
-                    <a:pt x="2435165" y="969985"/>
-                  </a:lnTo>
-                  <a:lnTo>
-                    <a:pt x="2506788" y="1060046"/>
-                  </a:lnTo>
-                  <a:lnTo>
-                    <a:pt x="2578410" y="1146881"/>
-                  </a:lnTo>
-                  <a:lnTo>
-                    <a:pt x="2650033" y="1230604"/>
-                  </a:lnTo>
-                  <a:lnTo>
-                    <a:pt x="2721655" y="1311328"/>
-                  </a:lnTo>
-                  <a:lnTo>
-                    <a:pt x="2793278" y="1389160"/>
-                  </a:lnTo>
-                  <a:lnTo>
-                    <a:pt x="2864901" y="1464203"/>
-                  </a:lnTo>
-                  <a:lnTo>
-                    <a:pt x="2936523" y="1536558"/>
-                  </a:lnTo>
-                  <a:lnTo>
-                    <a:pt x="3008146" y="1606320"/>
-                  </a:lnTo>
-                  <a:lnTo>
-                    <a:pt x="3079768" y="1673583"/>
-                  </a:lnTo>
-                  <a:lnTo>
-                    <a:pt x="3151391" y="1738437"/>
-                  </a:lnTo>
-                  <a:lnTo>
-                    <a:pt x="3223013" y="1800966"/>
-                  </a:lnTo>
-                  <a:lnTo>
-                    <a:pt x="3294636" y="1861256"/>
-                  </a:lnTo>
-                  <a:lnTo>
-                    <a:pt x="3366258" y="1919385"/>
-                  </a:lnTo>
-                  <a:lnTo>
-                    <a:pt x="3437881" y="1975432"/>
-                  </a:lnTo>
-                  <a:lnTo>
-                    <a:pt x="3509503" y="2029471"/>
-                  </a:lnTo>
-                  <a:lnTo>
-                    <a:pt x="3581126" y="2081574"/>
-                  </a:lnTo>
-                  <a:lnTo>
-                    <a:pt x="3652748" y="2131810"/>
-                  </a:lnTo>
-                  <a:lnTo>
-                    <a:pt x="3724371" y="2180246"/>
-                  </a:lnTo>
-                  <a:lnTo>
-                    <a:pt x="3795993" y="2226947"/>
-                  </a:lnTo>
-                  <a:lnTo>
-                    <a:pt x="3867616" y="2271974"/>
-                  </a:lnTo>
-                  <a:lnTo>
-                    <a:pt x="3939238" y="2315389"/>
-                  </a:lnTo>
-                  <a:lnTo>
-                    <a:pt x="4010861" y="2357248"/>
-                  </a:lnTo>
-                  <a:lnTo>
-                    <a:pt x="4082483" y="2397607"/>
-                  </a:lnTo>
-                  <a:lnTo>
-                    <a:pt x="4154106" y="2436521"/>
-                  </a:lnTo>
-                  <a:lnTo>
-                    <a:pt x="4225729" y="2474040"/>
-                  </a:lnTo>
-                  <a:lnTo>
-                    <a:pt x="4297351" y="2510215"/>
-                  </a:lnTo>
-                  <a:lnTo>
-                    <a:pt x="4368974" y="2545094"/>
-                  </a:lnTo>
-                  <a:lnTo>
-                    <a:pt x="4440596" y="2578723"/>
-                  </a:lnTo>
-                  <a:lnTo>
-                    <a:pt x="4512219" y="2611148"/>
-                  </a:lnTo>
-                  <a:lnTo>
-                    <a:pt x="4583841" y="2642411"/>
-                  </a:lnTo>
-                  <a:lnTo>
-                    <a:pt x="4655464" y="2654535"/>
-                  </a:lnTo>
-                  <a:lnTo>
-                    <a:pt x="4727086" y="2654948"/>
-                  </a:lnTo>
-                  <a:lnTo>
-                    <a:pt x="4798709" y="2655361"/>
-                  </a:lnTo>
-                  <a:lnTo>
-                    <a:pt x="4870331" y="2655774"/>
-                  </a:lnTo>
-                  <a:lnTo>
-                    <a:pt x="4941954" y="2656186"/>
-                  </a:lnTo>
-                  <a:lnTo>
-                    <a:pt x="5013576" y="2656598"/>
-                  </a:lnTo>
-                  <a:lnTo>
-                    <a:pt x="5085199" y="2657010"/>
-                  </a:lnTo>
-                  <a:lnTo>
-                    <a:pt x="5156821" y="2657422"/>
-                  </a:lnTo>
-                  <a:lnTo>
-                    <a:pt x="5228444" y="2657833"/>
-                  </a:lnTo>
-                  <a:lnTo>
-                    <a:pt x="5300066" y="2658245"/>
-                  </a:lnTo>
-                  <a:lnTo>
-                    <a:pt x="5371689" y="2658656"/>
-                  </a:lnTo>
-                  <a:lnTo>
-                    <a:pt x="5443311" y="2659067"/>
-                  </a:lnTo>
-                  <a:lnTo>
-                    <a:pt x="5514934" y="2659478"/>
-                  </a:lnTo>
-                  <a:lnTo>
-                    <a:pt x="5586557" y="2659888"/>
-                  </a:lnTo>
-                  <a:lnTo>
-                    <a:pt x="5658179" y="2660299"/>
-                  </a:lnTo>
-                  <a:lnTo>
-                    <a:pt x="5729802" y="2660709"/>
-                  </a:lnTo>
-                  <a:lnTo>
-                    <a:pt x="5801424" y="2661119"/>
-                  </a:lnTo>
-                  <a:lnTo>
-                    <a:pt x="5873047" y="2661528"/>
-                  </a:lnTo>
-                  <a:lnTo>
-                    <a:pt x="5944669" y="2661938"/>
-                  </a:lnTo>
-                  <a:lnTo>
-                    <a:pt x="6016292" y="2662347"/>
-                  </a:lnTo>
-                  <a:lnTo>
-                    <a:pt x="6087914" y="2662756"/>
-                  </a:lnTo>
-                  <a:lnTo>
-                    <a:pt x="6159537" y="2663165"/>
-                  </a:lnTo>
-                  <a:lnTo>
-                    <a:pt x="6231159" y="2663574"/>
-                  </a:lnTo>
-                  <a:lnTo>
-                    <a:pt x="6302782" y="2663982"/>
-                  </a:lnTo>
-                  <a:lnTo>
-                    <a:pt x="6374404" y="2664391"/>
-                  </a:lnTo>
-                  <a:lnTo>
-                    <a:pt x="6446027" y="2664799"/>
-                  </a:lnTo>
-                  <a:lnTo>
-                    <a:pt x="6517649" y="2665207"/>
-                  </a:lnTo>
-                  <a:lnTo>
-                    <a:pt x="6589272" y="2665614"/>
-                  </a:lnTo>
-                  <a:lnTo>
-                    <a:pt x="6660894" y="2666022"/>
-                  </a:lnTo>
-                  <a:lnTo>
-                    <a:pt x="6732517" y="2666429"/>
-                  </a:lnTo>
-                  <a:lnTo>
-                    <a:pt x="6804139" y="2666836"/>
-                  </a:lnTo>
-                  <a:lnTo>
-                    <a:pt x="6875762" y="2667243"/>
-                  </a:lnTo>
-                  <a:lnTo>
-                    <a:pt x="6947385" y="2667650"/>
-                  </a:lnTo>
-                  <a:lnTo>
-                    <a:pt x="7019007" y="2668056"/>
-                  </a:lnTo>
-                  <a:lnTo>
-                    <a:pt x="7090630" y="2668463"/>
-                  </a:lnTo>
-                  <a:lnTo>
-                    <a:pt x="7090630" y="3249114"/>
-                  </a:lnTo>
-                  <a:lnTo>
-                    <a:pt x="7019007" y="3240395"/>
-                  </a:lnTo>
-                  <a:lnTo>
-                    <a:pt x="6947385" y="3231352"/>
-                  </a:lnTo>
-                  <a:lnTo>
-                    <a:pt x="6875762" y="3221974"/>
-                  </a:lnTo>
-                  <a:lnTo>
-                    <a:pt x="6804139" y="3212247"/>
-                  </a:lnTo>
-                  <a:lnTo>
-                    <a:pt x="6732517" y="3202158"/>
-                  </a:lnTo>
-                  <a:lnTo>
-                    <a:pt x="6660894" y="3191695"/>
-                  </a:lnTo>
-                  <a:lnTo>
-                    <a:pt x="6589272" y="3180843"/>
-                  </a:lnTo>
-                  <a:lnTo>
-                    <a:pt x="6517649" y="3169587"/>
-                  </a:lnTo>
-                  <a:lnTo>
-                    <a:pt x="6446027" y="3157913"/>
-                  </a:lnTo>
-                  <a:lnTo>
-                    <a:pt x="6374404" y="3145806"/>
-                  </a:lnTo>
-                  <a:lnTo>
-                    <a:pt x="6302782" y="3133249"/>
-                  </a:lnTo>
-                  <a:lnTo>
-                    <a:pt x="6231159" y="3120224"/>
-                  </a:lnTo>
-                  <a:lnTo>
-                    <a:pt x="6159537" y="3106717"/>
-                  </a:lnTo>
-                  <a:lnTo>
-                    <a:pt x="6087914" y="3092707"/>
-                  </a:lnTo>
-                  <a:lnTo>
-                    <a:pt x="6016292" y="3078176"/>
-                  </a:lnTo>
-                  <a:lnTo>
-                    <a:pt x="5944669" y="3063106"/>
-                  </a:lnTo>
-                  <a:lnTo>
-                    <a:pt x="5873047" y="3047475"/>
-                  </a:lnTo>
-                  <a:lnTo>
-                    <a:pt x="5801424" y="3031264"/>
-                  </a:lnTo>
-                  <a:lnTo>
-                    <a:pt x="5729802" y="3014451"/>
-                  </a:lnTo>
-                  <a:lnTo>
-                    <a:pt x="5658179" y="2997012"/>
-                  </a:lnTo>
-                  <a:lnTo>
-                    <a:pt x="5586557" y="2978926"/>
-                  </a:lnTo>
-                  <a:lnTo>
-                    <a:pt x="5514934" y="2960167"/>
-                  </a:lnTo>
-                  <a:lnTo>
-                    <a:pt x="5443311" y="2940712"/>
-                  </a:lnTo>
-                  <a:lnTo>
-                    <a:pt x="5371689" y="2920534"/>
-                  </a:lnTo>
-                  <a:lnTo>
-                    <a:pt x="5300066" y="2899605"/>
-                  </a:lnTo>
-                  <a:lnTo>
-                    <a:pt x="5228444" y="2877900"/>
-                  </a:lnTo>
-                  <a:lnTo>
-                    <a:pt x="5156821" y="2855387"/>
-                  </a:lnTo>
-                  <a:lnTo>
-                    <a:pt x="5085199" y="2832038"/>
-                  </a:lnTo>
-                  <a:lnTo>
-                    <a:pt x="5013576" y="2807822"/>
-                  </a:lnTo>
-                  <a:lnTo>
-                    <a:pt x="4941954" y="2782705"/>
-                  </a:lnTo>
-                  <a:lnTo>
-                    <a:pt x="4870331" y="2756656"/>
-                  </a:lnTo>
-                  <a:lnTo>
-                    <a:pt x="4798709" y="2729638"/>
-                  </a:lnTo>
-                  <a:lnTo>
-                    <a:pt x="4727086" y="2701616"/>
-                  </a:lnTo>
-                  <a:lnTo>
-                    <a:pt x="4655464" y="2672554"/>
-                  </a:lnTo>
-                  <a:lnTo>
-                    <a:pt x="4583841" y="2654122"/>
-                  </a:lnTo>
-                  <a:lnTo>
-                    <a:pt x="4512219" y="2653708"/>
-                  </a:lnTo>
-                  <a:lnTo>
-                    <a:pt x="4440596" y="2653295"/>
-                  </a:lnTo>
-                  <a:lnTo>
-                    <a:pt x="4368974" y="2652881"/>
-                  </a:lnTo>
-                  <a:lnTo>
-                    <a:pt x="4297351" y="2652467"/>
-                  </a:lnTo>
-                  <a:lnTo>
-                    <a:pt x="4225729" y="2652053"/>
-                  </a:lnTo>
-                  <a:lnTo>
-                    <a:pt x="4154106" y="2651638"/>
-                  </a:lnTo>
-                  <a:lnTo>
-                    <a:pt x="4082483" y="2651224"/>
-                  </a:lnTo>
-                  <a:lnTo>
-                    <a:pt x="4010861" y="2650809"/>
-                  </a:lnTo>
-                  <a:lnTo>
-                    <a:pt x="3939238" y="2650394"/>
-                  </a:lnTo>
-                  <a:lnTo>
-                    <a:pt x="3867616" y="2649978"/>
-                  </a:lnTo>
-                  <a:lnTo>
-                    <a:pt x="3795993" y="2649563"/>
-                  </a:lnTo>
-                  <a:lnTo>
-                    <a:pt x="3724371" y="2649147"/>
-                  </a:lnTo>
-                  <a:lnTo>
-                    <a:pt x="3652748" y="2648731"/>
-                  </a:lnTo>
-                  <a:lnTo>
-                    <a:pt x="3581126" y="2648315"/>
-                  </a:lnTo>
-                  <a:lnTo>
-                    <a:pt x="3509503" y="2647899"/>
-                  </a:lnTo>
-                  <a:lnTo>
-                    <a:pt x="3437881" y="2647482"/>
-                  </a:lnTo>
-                  <a:lnTo>
-                    <a:pt x="3366258" y="2647066"/>
-                  </a:lnTo>
-                  <a:lnTo>
-                    <a:pt x="3294636" y="2646649"/>
-                  </a:lnTo>
-                  <a:lnTo>
-                    <a:pt x="3223013" y="2646232"/>
-                  </a:lnTo>
-                  <a:lnTo>
-                    <a:pt x="3151391" y="2645814"/>
-                  </a:lnTo>
-                  <a:lnTo>
-                    <a:pt x="3079768" y="2645397"/>
-                  </a:lnTo>
-                  <a:lnTo>
-                    <a:pt x="3008146" y="2644979"/>
-                  </a:lnTo>
-                  <a:lnTo>
-                    <a:pt x="2936523" y="2644561"/>
-                  </a:lnTo>
-                  <a:lnTo>
-                    <a:pt x="2864901" y="2644143"/>
-                  </a:lnTo>
-                  <a:lnTo>
-                    <a:pt x="2793278" y="2643724"/>
-                  </a:lnTo>
-                  <a:lnTo>
-                    <a:pt x="2721655" y="2643306"/>
-                  </a:lnTo>
-                  <a:lnTo>
-                    <a:pt x="2650033" y="2642887"/>
-                  </a:lnTo>
-                  <a:lnTo>
-                    <a:pt x="2578410" y="2642468"/>
-                  </a:lnTo>
-                  <a:lnTo>
-                    <a:pt x="2506788" y="2642049"/>
-                  </a:lnTo>
-                  <a:lnTo>
-                    <a:pt x="2435165" y="2641629"/>
-                  </a:lnTo>
-                  <a:lnTo>
-                    <a:pt x="2363543" y="2641210"/>
-                  </a:lnTo>
-                  <a:lnTo>
-                    <a:pt x="2291920" y="2640790"/>
-                  </a:lnTo>
-                  <a:lnTo>
-                    <a:pt x="2220298" y="2640370"/>
-                  </a:lnTo>
-                  <a:lnTo>
-                    <a:pt x="2148675" y="2639949"/>
-                  </a:lnTo>
-                  <a:lnTo>
-                    <a:pt x="2077053" y="2639529"/>
-                  </a:lnTo>
-                  <a:lnTo>
-                    <a:pt x="2005430" y="2639108"/>
-                  </a:lnTo>
-                  <a:lnTo>
-                    <a:pt x="1933808" y="2638687"/>
-                  </a:lnTo>
-                  <a:lnTo>
-                    <a:pt x="1862185" y="2638266"/>
-                  </a:lnTo>
-                  <a:lnTo>
-                    <a:pt x="1790563" y="2637845"/>
-                  </a:lnTo>
-                  <a:lnTo>
-                    <a:pt x="1718940" y="2637423"/>
-                  </a:lnTo>
-                  <a:lnTo>
-                    <a:pt x="1647318" y="2637002"/>
-                  </a:lnTo>
-                  <a:lnTo>
-                    <a:pt x="1575695" y="2636580"/>
-                  </a:lnTo>
-                  <a:lnTo>
-                    <a:pt x="1504073" y="2636157"/>
-                  </a:lnTo>
-                  <a:lnTo>
-                    <a:pt x="1432450" y="2635735"/>
-                  </a:lnTo>
-                  <a:lnTo>
-                    <a:pt x="1360827" y="2635313"/>
-                  </a:lnTo>
-                  <a:lnTo>
-                    <a:pt x="1289205" y="2634890"/>
-                  </a:lnTo>
-                  <a:lnTo>
-                    <a:pt x="1217582" y="2634467"/>
-                  </a:lnTo>
-                  <a:lnTo>
-                    <a:pt x="1145960" y="2634044"/>
-                  </a:lnTo>
-                  <a:lnTo>
-                    <a:pt x="1074337" y="2633620"/>
-                  </a:lnTo>
-                  <a:lnTo>
-                    <a:pt x="1002715" y="2633196"/>
-                  </a:lnTo>
-                  <a:lnTo>
-                    <a:pt x="931092" y="2632773"/>
-                  </a:lnTo>
-                  <a:lnTo>
-                    <a:pt x="859470" y="2632349"/>
-                  </a:lnTo>
-                  <a:lnTo>
-                    <a:pt x="787847" y="2631924"/>
-                  </a:lnTo>
-                  <a:lnTo>
-                    <a:pt x="716225" y="2631500"/>
-                  </a:lnTo>
-                  <a:lnTo>
-                    <a:pt x="644602" y="2631075"/>
-                  </a:lnTo>
-                  <a:lnTo>
-                    <a:pt x="572980" y="2630650"/>
-                  </a:lnTo>
-                  <a:lnTo>
-                    <a:pt x="501357" y="2630225"/>
-                  </a:lnTo>
-                  <a:lnTo>
-                    <a:pt x="429735" y="2629800"/>
-                  </a:lnTo>
-                  <a:lnTo>
-                    <a:pt x="358112" y="2629374"/>
-                  </a:lnTo>
-                  <a:lnTo>
-                    <a:pt x="286490" y="2628948"/>
-                  </a:lnTo>
-                  <a:lnTo>
-                    <a:pt x="214867" y="2628522"/>
-                  </a:lnTo>
-                  <a:lnTo>
-                    <a:pt x="143245" y="2628096"/>
-                  </a:lnTo>
-                  <a:lnTo>
-                    <a:pt x="71622" y="2627670"/>
-                  </a:lnTo>
-                  <a:lnTo>
-                    <a:pt x="0" y="2627243"/>
+                    <a:pt x="1862185" y="120029"/>
+                  </a:lnTo>
+                  <a:lnTo>
+                    <a:pt x="1933808" y="240090"/>
+                  </a:lnTo>
+                  <a:lnTo>
+                    <a:pt x="2005430" y="355865"/>
+                  </a:lnTo>
+                  <a:lnTo>
+                    <a:pt x="2077053" y="467508"/>
+                  </a:lnTo>
+                  <a:lnTo>
+                    <a:pt x="2148675" y="575166"/>
+                  </a:lnTo>
+                  <a:lnTo>
+                    <a:pt x="2220298" y="678982"/>
+                  </a:lnTo>
+                  <a:lnTo>
+                    <a:pt x="2291920" y="779092"/>
+                  </a:lnTo>
+                  <a:lnTo>
+                    <a:pt x="2363543" y="875629"/>
+                  </a:lnTo>
+                  <a:lnTo>
+                    <a:pt x="2435165" y="968720"/>
+                  </a:lnTo>
+                  <a:lnTo>
+                    <a:pt x="2506788" y="1058488"/>
+                  </a:lnTo>
+                  <a:lnTo>
+                    <a:pt x="2578410" y="1145053"/>
+                  </a:lnTo>
+                  <a:lnTo>
+                    <a:pt x="2650033" y="1228527"/>
+                  </a:lnTo>
+                  <a:lnTo>
+                    <a:pt x="2721655" y="1309022"/>
+                  </a:lnTo>
+                  <a:lnTo>
+                    <a:pt x="2793278" y="1386645"/>
+                  </a:lnTo>
+                  <a:lnTo>
+                    <a:pt x="2864901" y="1461496"/>
+                  </a:lnTo>
+                  <a:lnTo>
+                    <a:pt x="2936523" y="1533676"/>
+                  </a:lnTo>
+                  <a:lnTo>
+                    <a:pt x="3008146" y="1603280"/>
+                  </a:lnTo>
+                  <a:lnTo>
+                    <a:pt x="3079768" y="1670399"/>
+                  </a:lnTo>
+                  <a:lnTo>
+                    <a:pt x="3151391" y="1735122"/>
+                  </a:lnTo>
+                  <a:lnTo>
+                    <a:pt x="3223013" y="1797536"/>
+                  </a:lnTo>
+                  <a:lnTo>
+                    <a:pt x="3294636" y="1857721"/>
+                  </a:lnTo>
+                  <a:lnTo>
+                    <a:pt x="3366258" y="1915759"/>
+                  </a:lnTo>
+                  <a:lnTo>
+                    <a:pt x="3437881" y="1971725"/>
+                  </a:lnTo>
+                  <a:lnTo>
+                    <a:pt x="3509503" y="2025693"/>
+                  </a:lnTo>
+                  <a:lnTo>
+                    <a:pt x="3581126" y="2077735"/>
+                  </a:lnTo>
+                  <a:lnTo>
+                    <a:pt x="3652748" y="2127920"/>
+                  </a:lnTo>
+                  <a:lnTo>
+                    <a:pt x="3724371" y="2176313"/>
+                  </a:lnTo>
+                  <a:lnTo>
+                    <a:pt x="3795993" y="2222979"/>
+                  </a:lnTo>
+                  <a:lnTo>
+                    <a:pt x="3867616" y="2267980"/>
+                  </a:lnTo>
+                  <a:lnTo>
+                    <a:pt x="3939238" y="2311374"/>
+                  </a:lnTo>
+                  <a:lnTo>
+                    <a:pt x="4010861" y="2353219"/>
+                  </a:lnTo>
+                  <a:lnTo>
+                    <a:pt x="4082483" y="2393571"/>
+                  </a:lnTo>
+                  <a:lnTo>
+                    <a:pt x="4154106" y="2432482"/>
+                  </a:lnTo>
+                  <a:lnTo>
+                    <a:pt x="4225729" y="2470005"/>
+                  </a:lnTo>
+                  <a:lnTo>
+                    <a:pt x="4297351" y="2506188"/>
+                  </a:lnTo>
+                  <a:lnTo>
+                    <a:pt x="4368974" y="2541080"/>
+                  </a:lnTo>
+                  <a:lnTo>
+                    <a:pt x="4440596" y="2574726"/>
+                  </a:lnTo>
+                  <a:lnTo>
+                    <a:pt x="4512219" y="2607172"/>
+                  </a:lnTo>
+                  <a:lnTo>
+                    <a:pt x="4583841" y="2638459"/>
+                  </a:lnTo>
+                  <a:lnTo>
+                    <a:pt x="4655464" y="2654253"/>
+                  </a:lnTo>
+                  <a:lnTo>
+                    <a:pt x="4727086" y="2654191"/>
+                  </a:lnTo>
+                  <a:lnTo>
+                    <a:pt x="4798709" y="2654129"/>
+                  </a:lnTo>
+                  <a:lnTo>
+                    <a:pt x="4870331" y="2654067"/>
+                  </a:lnTo>
+                  <a:lnTo>
+                    <a:pt x="4941954" y="2654005"/>
+                  </a:lnTo>
+                  <a:lnTo>
+                    <a:pt x="5013576" y="2653943"/>
+                  </a:lnTo>
+                  <a:lnTo>
+                    <a:pt x="5085199" y="2653881"/>
+                  </a:lnTo>
+                  <a:lnTo>
+                    <a:pt x="5156821" y="2653820"/>
+                  </a:lnTo>
+                  <a:lnTo>
+                    <a:pt x="5228444" y="2653758"/>
+                  </a:lnTo>
+                  <a:lnTo>
+                    <a:pt x="5300066" y="2653696"/>
+                  </a:lnTo>
+                  <a:lnTo>
+                    <a:pt x="5371689" y="2653634"/>
+                  </a:lnTo>
+                  <a:lnTo>
+                    <a:pt x="5443311" y="2653572"/>
+                  </a:lnTo>
+                  <a:lnTo>
+                    <a:pt x="5514934" y="2653510"/>
+                  </a:lnTo>
+                  <a:lnTo>
+                    <a:pt x="5586557" y="2653448"/>
+                  </a:lnTo>
+                  <a:lnTo>
+                    <a:pt x="5658179" y="2653386"/>
+                  </a:lnTo>
+                  <a:lnTo>
+                    <a:pt x="5729802" y="2653324"/>
+                  </a:lnTo>
+                  <a:lnTo>
+                    <a:pt x="5801424" y="2653262"/>
+                  </a:lnTo>
+                  <a:lnTo>
+                    <a:pt x="5873047" y="2653200"/>
+                  </a:lnTo>
+                  <a:lnTo>
+                    <a:pt x="5944669" y="2653138"/>
+                  </a:lnTo>
+                  <a:lnTo>
+                    <a:pt x="6016292" y="2653076"/>
+                  </a:lnTo>
+                  <a:lnTo>
+                    <a:pt x="6087914" y="2653014"/>
+                  </a:lnTo>
+                  <a:lnTo>
+                    <a:pt x="6159537" y="2652952"/>
+                  </a:lnTo>
+                  <a:lnTo>
+                    <a:pt x="6231159" y="2652890"/>
+                  </a:lnTo>
+                  <a:lnTo>
+                    <a:pt x="6302782" y="2652828"/>
+                  </a:lnTo>
+                  <a:lnTo>
+                    <a:pt x="6374404" y="2652766"/>
+                  </a:lnTo>
+                  <a:lnTo>
+                    <a:pt x="6446027" y="2652703"/>
+                  </a:lnTo>
+                  <a:lnTo>
+                    <a:pt x="6517649" y="2652641"/>
+                  </a:lnTo>
+                  <a:lnTo>
+                    <a:pt x="6589272" y="2652579"/>
+                  </a:lnTo>
+                  <a:lnTo>
+                    <a:pt x="6660894" y="2652517"/>
+                  </a:lnTo>
+                  <a:lnTo>
+                    <a:pt x="6732517" y="2652455"/>
+                  </a:lnTo>
+                  <a:lnTo>
+                    <a:pt x="6804139" y="2652393"/>
+                  </a:lnTo>
+                  <a:lnTo>
+                    <a:pt x="6875762" y="2652331"/>
+                  </a:lnTo>
+                  <a:lnTo>
+                    <a:pt x="6947385" y="2652269"/>
+                  </a:lnTo>
+                  <a:lnTo>
+                    <a:pt x="7019007" y="2652207"/>
+                  </a:lnTo>
+                  <a:lnTo>
+                    <a:pt x="7090630" y="2652145"/>
+                  </a:lnTo>
+                  <a:lnTo>
+                    <a:pt x="7090630" y="3246859"/>
+                  </a:lnTo>
+                  <a:lnTo>
+                    <a:pt x="7019007" y="3238090"/>
+                  </a:lnTo>
+                  <a:lnTo>
+                    <a:pt x="6947385" y="3228998"/>
+                  </a:lnTo>
+                  <a:lnTo>
+                    <a:pt x="6875762" y="3219568"/>
+                  </a:lnTo>
+                  <a:lnTo>
+                    <a:pt x="6804139" y="3209790"/>
+                  </a:lnTo>
+                  <a:lnTo>
+                    <a:pt x="6732517" y="3199650"/>
+                  </a:lnTo>
+                  <a:lnTo>
+                    <a:pt x="6660894" y="3189134"/>
+                  </a:lnTo>
+                  <a:lnTo>
+                    <a:pt x="6589272" y="3178230"/>
+                  </a:lnTo>
+                  <a:lnTo>
+                    <a:pt x="6517649" y="3166921"/>
+                  </a:lnTo>
+                  <a:lnTo>
+                    <a:pt x="6446027" y="3155194"/>
+                  </a:lnTo>
+                  <a:lnTo>
+                    <a:pt x="6374404" y="3143033"/>
+                  </a:lnTo>
+                  <a:lnTo>
+                    <a:pt x="6302782" y="3130422"/>
+                  </a:lnTo>
+                  <a:lnTo>
+                    <a:pt x="6231159" y="3117344"/>
+                  </a:lnTo>
+                  <a:lnTo>
+                    <a:pt x="6159537" y="3103782"/>
+                  </a:lnTo>
+                  <a:lnTo>
+                    <a:pt x="6087914" y="3089718"/>
+                  </a:lnTo>
+                  <a:lnTo>
+                    <a:pt x="6016292" y="3075134"/>
+                  </a:lnTo>
+                  <a:lnTo>
+                    <a:pt x="5944669" y="3060009"/>
+                  </a:lnTo>
+                  <a:lnTo>
+                    <a:pt x="5873047" y="3044325"/>
+                  </a:lnTo>
+                  <a:lnTo>
+                    <a:pt x="5801424" y="3028060"/>
+                  </a:lnTo>
+                  <a:lnTo>
+                    <a:pt x="5729802" y="3011194"/>
+                  </a:lnTo>
+                  <a:lnTo>
+                    <a:pt x="5658179" y="2993703"/>
+                  </a:lnTo>
+                  <a:lnTo>
+                    <a:pt x="5586557" y="2975564"/>
+                  </a:lnTo>
+                  <a:lnTo>
+                    <a:pt x="5514934" y="2956754"/>
+                  </a:lnTo>
+                  <a:lnTo>
+                    <a:pt x="5443311" y="2937248"/>
+                  </a:lnTo>
+                  <a:lnTo>
+                    <a:pt x="5371689" y="2917020"/>
+                  </a:lnTo>
+                  <a:lnTo>
+                    <a:pt x="5300066" y="2896043"/>
+                  </a:lnTo>
+                  <a:lnTo>
+                    <a:pt x="5228444" y="2874290"/>
+                  </a:lnTo>
+                  <a:lnTo>
+                    <a:pt x="5156821" y="2851732"/>
+                  </a:lnTo>
+                  <a:lnTo>
+                    <a:pt x="5085199" y="2828338"/>
+                  </a:lnTo>
+                  <a:lnTo>
+                    <a:pt x="5013576" y="2804079"/>
+                  </a:lnTo>
+                  <a:lnTo>
+                    <a:pt x="4941954" y="2778922"/>
+                  </a:lnTo>
+                  <a:lnTo>
+                    <a:pt x="4870331" y="2752833"/>
+                  </a:lnTo>
+                  <a:lnTo>
+                    <a:pt x="4798709" y="2725779"/>
+                  </a:lnTo>
+                  <a:lnTo>
+                    <a:pt x="4727086" y="2697724"/>
+                  </a:lnTo>
+                  <a:lnTo>
+                    <a:pt x="4655464" y="2668630"/>
+                  </a:lnTo>
+                  <a:lnTo>
+                    <a:pt x="4583841" y="2654315"/>
+                  </a:lnTo>
+                  <a:lnTo>
+                    <a:pt x="4512219" y="2654377"/>
+                  </a:lnTo>
+                  <a:lnTo>
+                    <a:pt x="4440596" y="2654439"/>
+                  </a:lnTo>
+                  <a:lnTo>
+                    <a:pt x="4368974" y="2654501"/>
+                  </a:lnTo>
+                  <a:lnTo>
+                    <a:pt x="4297351" y="2654563"/>
+                  </a:lnTo>
+                  <a:lnTo>
+                    <a:pt x="4225729" y="2654625"/>
+                  </a:lnTo>
+                  <a:lnTo>
+                    <a:pt x="4154106" y="2654687"/>
+                  </a:lnTo>
+                  <a:lnTo>
+                    <a:pt x="4082483" y="2654748"/>
+                  </a:lnTo>
+                  <a:lnTo>
+                    <a:pt x="4010861" y="2654810"/>
+                  </a:lnTo>
+                  <a:lnTo>
+                    <a:pt x="3939238" y="2654872"/>
+                  </a:lnTo>
+                  <a:lnTo>
+                    <a:pt x="3867616" y="2654934"/>
+                  </a:lnTo>
+                  <a:lnTo>
+                    <a:pt x="3795993" y="2654996"/>
+                  </a:lnTo>
+                  <a:lnTo>
+                    <a:pt x="3724371" y="2655058"/>
+                  </a:lnTo>
+                  <a:lnTo>
+                    <a:pt x="3652748" y="2655120"/>
+                  </a:lnTo>
+                  <a:lnTo>
+                    <a:pt x="3581126" y="2655182"/>
+                  </a:lnTo>
+                  <a:lnTo>
+                    <a:pt x="3509503" y="2655243"/>
+                  </a:lnTo>
+                  <a:lnTo>
+                    <a:pt x="3437881" y="2655305"/>
+                  </a:lnTo>
+                  <a:lnTo>
+                    <a:pt x="3366258" y="2655367"/>
+                  </a:lnTo>
+                  <a:lnTo>
+                    <a:pt x="3294636" y="2655429"/>
+                  </a:lnTo>
+                  <a:lnTo>
+                    <a:pt x="3223013" y="2655491"/>
+                  </a:lnTo>
+                  <a:lnTo>
+                    <a:pt x="3151391" y="2655553"/>
+                  </a:lnTo>
+                  <a:lnTo>
+                    <a:pt x="3079768" y="2655614"/>
+                  </a:lnTo>
+                  <a:lnTo>
+                    <a:pt x="3008146" y="2655676"/>
+                  </a:lnTo>
+                  <a:lnTo>
+                    <a:pt x="2936523" y="2655738"/>
+                  </a:lnTo>
+                  <a:lnTo>
+                    <a:pt x="2864901" y="2655800"/>
+                  </a:lnTo>
+                  <a:lnTo>
+                    <a:pt x="2793278" y="2655862"/>
+                  </a:lnTo>
+                  <a:lnTo>
+                    <a:pt x="2721655" y="2655923"/>
+                  </a:lnTo>
+                  <a:lnTo>
+                    <a:pt x="2650033" y="2655985"/>
+                  </a:lnTo>
+                  <a:lnTo>
+                    <a:pt x="2578410" y="2656047"/>
+                  </a:lnTo>
+                  <a:lnTo>
+                    <a:pt x="2506788" y="2656109"/>
+                  </a:lnTo>
+                  <a:lnTo>
+                    <a:pt x="2435165" y="2656171"/>
+                  </a:lnTo>
+                  <a:lnTo>
+                    <a:pt x="2363543" y="2656232"/>
+                  </a:lnTo>
+                  <a:lnTo>
+                    <a:pt x="2291920" y="2656294"/>
+                  </a:lnTo>
+                  <a:lnTo>
+                    <a:pt x="2220298" y="2656356"/>
+                  </a:lnTo>
+                  <a:lnTo>
+                    <a:pt x="2148675" y="2656418"/>
+                  </a:lnTo>
+                  <a:lnTo>
+                    <a:pt x="2077053" y="2656480"/>
+                  </a:lnTo>
+                  <a:lnTo>
+                    <a:pt x="2005430" y="2656541"/>
+                  </a:lnTo>
+                  <a:lnTo>
+                    <a:pt x="1933808" y="2656603"/>
+                  </a:lnTo>
+                  <a:lnTo>
+                    <a:pt x="1862185" y="2656665"/>
+                  </a:lnTo>
+                  <a:lnTo>
+                    <a:pt x="1790563" y="2656727"/>
+                  </a:lnTo>
+                  <a:lnTo>
+                    <a:pt x="1718940" y="2656788"/>
+                  </a:lnTo>
+                  <a:lnTo>
+                    <a:pt x="1647318" y="2656850"/>
+                  </a:lnTo>
+                  <a:lnTo>
+                    <a:pt x="1575695" y="2656912"/>
+                  </a:lnTo>
+                  <a:lnTo>
+                    <a:pt x="1504073" y="2656973"/>
+                  </a:lnTo>
+                  <a:lnTo>
+                    <a:pt x="1432450" y="2657035"/>
+                  </a:lnTo>
+                  <a:lnTo>
+                    <a:pt x="1360827" y="2657097"/>
+                  </a:lnTo>
+                  <a:lnTo>
+                    <a:pt x="1289205" y="2657159"/>
+                  </a:lnTo>
+                  <a:lnTo>
+                    <a:pt x="1217582" y="2657220"/>
+                  </a:lnTo>
+                  <a:lnTo>
+                    <a:pt x="1145960" y="2657282"/>
+                  </a:lnTo>
+                  <a:lnTo>
+                    <a:pt x="1074337" y="2657344"/>
+                  </a:lnTo>
+                  <a:lnTo>
+                    <a:pt x="1002715" y="2657405"/>
+                  </a:lnTo>
+                  <a:lnTo>
+                    <a:pt x="931092" y="2657467"/>
+                  </a:lnTo>
+                  <a:lnTo>
+                    <a:pt x="859470" y="2657529"/>
+                  </a:lnTo>
+                  <a:lnTo>
+                    <a:pt x="787847" y="2657590"/>
+                  </a:lnTo>
+                  <a:lnTo>
+                    <a:pt x="716225" y="2657652"/>
+                  </a:lnTo>
+                  <a:lnTo>
+                    <a:pt x="644602" y="2657714"/>
+                  </a:lnTo>
+                  <a:lnTo>
+                    <a:pt x="572980" y="2657775"/>
+                  </a:lnTo>
+                  <a:lnTo>
+                    <a:pt x="501357" y="2657837"/>
+                  </a:lnTo>
+                  <a:lnTo>
+                    <a:pt x="429735" y="2657899"/>
+                  </a:lnTo>
+                  <a:lnTo>
+                    <a:pt x="358112" y="2657960"/>
+                  </a:lnTo>
+                  <a:lnTo>
+                    <a:pt x="286490" y="2658022"/>
+                  </a:lnTo>
+                  <a:lnTo>
+                    <a:pt x="214867" y="2658084"/>
+                  </a:lnTo>
+                  <a:lnTo>
+                    <a:pt x="143245" y="2658145"/>
+                  </a:lnTo>
+                  <a:lnTo>
+                    <a:pt x="71622" y="2658207"/>
+                  </a:lnTo>
+                  <a:lnTo>
+                    <a:pt x="0" y="2658269"/>
                   </a:lnTo>
                   <a:close/>
                 </a:path>
@@ -3472,237 +3472,237 @@
           </p:nvSpPr>
           <p:spPr>
             <a:xfrm>
-              <a:off x="2966677" y="2073503"/>
-              <a:ext cx="5296002" cy="2668463"/>
+              <a:off x="2965186" y="2073503"/>
+              <a:ext cx="5297492" cy="2654253"/>
             </a:xfrm>
             <a:custGeom>
               <a:avLst/>
               <a:pathLst>
-                <a:path w="5296002" h="2668463">
+                <a:path w="5297492" h="2654253">
                   <a:moveTo>
                     <a:pt x="0" y="0"/>
                   </a:moveTo>
                   <a:lnTo>
-                    <a:pt x="67557" y="117969"/>
-                  </a:lnTo>
-                  <a:lnTo>
-                    <a:pt x="139180" y="238556"/>
-                  </a:lnTo>
-                  <a:lnTo>
-                    <a:pt x="210802" y="354822"/>
-                  </a:lnTo>
-                  <a:lnTo>
-                    <a:pt x="282425" y="466923"/>
-                  </a:lnTo>
-                  <a:lnTo>
-                    <a:pt x="354047" y="575007"/>
-                  </a:lnTo>
-                  <a:lnTo>
-                    <a:pt x="425670" y="679220"/>
-                  </a:lnTo>
-                  <a:lnTo>
-                    <a:pt x="497292" y="779698"/>
-                  </a:lnTo>
-                  <a:lnTo>
-                    <a:pt x="568915" y="876577"/>
-                  </a:lnTo>
-                  <a:lnTo>
-                    <a:pt x="640537" y="969985"/>
-                  </a:lnTo>
-                  <a:lnTo>
-                    <a:pt x="712160" y="1060046"/>
-                  </a:lnTo>
-                  <a:lnTo>
-                    <a:pt x="783782" y="1146881"/>
-                  </a:lnTo>
-                  <a:lnTo>
-                    <a:pt x="855405" y="1230604"/>
-                  </a:lnTo>
-                  <a:lnTo>
-                    <a:pt x="927028" y="1311328"/>
-                  </a:lnTo>
-                  <a:lnTo>
-                    <a:pt x="998650" y="1389160"/>
-                  </a:lnTo>
-                  <a:lnTo>
-                    <a:pt x="1070273" y="1464203"/>
-                  </a:lnTo>
-                  <a:lnTo>
-                    <a:pt x="1141895" y="1536558"/>
-                  </a:lnTo>
-                  <a:lnTo>
-                    <a:pt x="1213518" y="1606320"/>
-                  </a:lnTo>
-                  <a:lnTo>
-                    <a:pt x="1285140" y="1673583"/>
-                  </a:lnTo>
-                  <a:lnTo>
-                    <a:pt x="1356763" y="1738437"/>
-                  </a:lnTo>
-                  <a:lnTo>
-                    <a:pt x="1428385" y="1800966"/>
-                  </a:lnTo>
-                  <a:lnTo>
-                    <a:pt x="1500008" y="1861256"/>
-                  </a:lnTo>
-                  <a:lnTo>
-                    <a:pt x="1571630" y="1919385"/>
-                  </a:lnTo>
-                  <a:lnTo>
-                    <a:pt x="1643253" y="1975432"/>
-                  </a:lnTo>
-                  <a:lnTo>
-                    <a:pt x="1714875" y="2029471"/>
-                  </a:lnTo>
-                  <a:lnTo>
-                    <a:pt x="1786498" y="2081574"/>
-                  </a:lnTo>
-                  <a:lnTo>
-                    <a:pt x="1858120" y="2131810"/>
-                  </a:lnTo>
-                  <a:lnTo>
-                    <a:pt x="1929743" y="2180246"/>
-                  </a:lnTo>
-                  <a:lnTo>
-                    <a:pt x="2001365" y="2226947"/>
-                  </a:lnTo>
-                  <a:lnTo>
-                    <a:pt x="2072988" y="2271974"/>
-                  </a:lnTo>
-                  <a:lnTo>
-                    <a:pt x="2144610" y="2315389"/>
-                  </a:lnTo>
-                  <a:lnTo>
-                    <a:pt x="2216233" y="2357248"/>
-                  </a:lnTo>
-                  <a:lnTo>
-                    <a:pt x="2287856" y="2397607"/>
-                  </a:lnTo>
-                  <a:lnTo>
-                    <a:pt x="2359478" y="2436521"/>
-                  </a:lnTo>
-                  <a:lnTo>
-                    <a:pt x="2431101" y="2474040"/>
-                  </a:lnTo>
-                  <a:lnTo>
-                    <a:pt x="2502723" y="2510215"/>
-                  </a:lnTo>
-                  <a:lnTo>
-                    <a:pt x="2574346" y="2545094"/>
-                  </a:lnTo>
-                  <a:lnTo>
-                    <a:pt x="2645968" y="2578723"/>
-                  </a:lnTo>
-                  <a:lnTo>
-                    <a:pt x="2717591" y="2611148"/>
-                  </a:lnTo>
-                  <a:lnTo>
-                    <a:pt x="2789213" y="2642411"/>
-                  </a:lnTo>
-                  <a:lnTo>
-                    <a:pt x="2860836" y="2654535"/>
-                  </a:lnTo>
-                  <a:lnTo>
-                    <a:pt x="2932458" y="2654948"/>
-                  </a:lnTo>
-                  <a:lnTo>
-                    <a:pt x="3004081" y="2655361"/>
-                  </a:lnTo>
-                  <a:lnTo>
-                    <a:pt x="3075703" y="2655774"/>
-                  </a:lnTo>
-                  <a:lnTo>
-                    <a:pt x="3147326" y="2656186"/>
-                  </a:lnTo>
-                  <a:lnTo>
-                    <a:pt x="3218948" y="2656598"/>
-                  </a:lnTo>
-                  <a:lnTo>
-                    <a:pt x="3290571" y="2657010"/>
-                  </a:lnTo>
-                  <a:lnTo>
-                    <a:pt x="3362193" y="2657422"/>
-                  </a:lnTo>
-                  <a:lnTo>
-                    <a:pt x="3433816" y="2657833"/>
-                  </a:lnTo>
-                  <a:lnTo>
-                    <a:pt x="3505438" y="2658245"/>
-                  </a:lnTo>
-                  <a:lnTo>
-                    <a:pt x="3577061" y="2658656"/>
-                  </a:lnTo>
-                  <a:lnTo>
-                    <a:pt x="3648684" y="2659067"/>
-                  </a:lnTo>
-                  <a:lnTo>
-                    <a:pt x="3720306" y="2659478"/>
-                  </a:lnTo>
-                  <a:lnTo>
-                    <a:pt x="3791929" y="2659888"/>
-                  </a:lnTo>
-                  <a:lnTo>
-                    <a:pt x="3863551" y="2660299"/>
-                  </a:lnTo>
-                  <a:lnTo>
-                    <a:pt x="3935174" y="2660709"/>
-                  </a:lnTo>
-                  <a:lnTo>
-                    <a:pt x="4006796" y="2661119"/>
-                  </a:lnTo>
-                  <a:lnTo>
-                    <a:pt x="4078419" y="2661528"/>
-                  </a:lnTo>
-                  <a:lnTo>
-                    <a:pt x="4150041" y="2661938"/>
-                  </a:lnTo>
-                  <a:lnTo>
-                    <a:pt x="4221664" y="2662347"/>
-                  </a:lnTo>
-                  <a:lnTo>
-                    <a:pt x="4293286" y="2662756"/>
-                  </a:lnTo>
-                  <a:lnTo>
-                    <a:pt x="4364909" y="2663165"/>
-                  </a:lnTo>
-                  <a:lnTo>
-                    <a:pt x="4436531" y="2663574"/>
-                  </a:lnTo>
-                  <a:lnTo>
-                    <a:pt x="4508154" y="2663982"/>
-                  </a:lnTo>
-                  <a:lnTo>
-                    <a:pt x="4579776" y="2664391"/>
-                  </a:lnTo>
-                  <a:lnTo>
-                    <a:pt x="4651399" y="2664799"/>
-                  </a:lnTo>
-                  <a:lnTo>
-                    <a:pt x="4723021" y="2665207"/>
-                  </a:lnTo>
-                  <a:lnTo>
-                    <a:pt x="4794644" y="2665614"/>
-                  </a:lnTo>
-                  <a:lnTo>
-                    <a:pt x="4866266" y="2666022"/>
-                  </a:lnTo>
-                  <a:lnTo>
-                    <a:pt x="4937889" y="2666429"/>
-                  </a:lnTo>
-                  <a:lnTo>
-                    <a:pt x="5009512" y="2666836"/>
-                  </a:lnTo>
-                  <a:lnTo>
-                    <a:pt x="5081134" y="2667243"/>
-                  </a:lnTo>
-                  <a:lnTo>
-                    <a:pt x="5152757" y="2667650"/>
-                  </a:lnTo>
-                  <a:lnTo>
-                    <a:pt x="5224379" y="2668056"/>
-                  </a:lnTo>
-                  <a:lnTo>
-                    <a:pt x="5296002" y="2668463"/>
+                    <a:pt x="69048" y="120029"/>
+                  </a:lnTo>
+                  <a:lnTo>
+                    <a:pt x="140670" y="240090"/>
+                  </a:lnTo>
+                  <a:lnTo>
+                    <a:pt x="212293" y="355865"/>
+                  </a:lnTo>
+                  <a:lnTo>
+                    <a:pt x="283915" y="467508"/>
+                  </a:lnTo>
+                  <a:lnTo>
+                    <a:pt x="355538" y="575166"/>
+                  </a:lnTo>
+                  <a:lnTo>
+                    <a:pt x="427160" y="678982"/>
+                  </a:lnTo>
+                  <a:lnTo>
+                    <a:pt x="498783" y="779092"/>
+                  </a:lnTo>
+                  <a:lnTo>
+                    <a:pt x="570405" y="875629"/>
+                  </a:lnTo>
+                  <a:lnTo>
+                    <a:pt x="642028" y="968720"/>
+                  </a:lnTo>
+                  <a:lnTo>
+                    <a:pt x="713650" y="1058488"/>
+                  </a:lnTo>
+                  <a:lnTo>
+                    <a:pt x="785273" y="1145053"/>
+                  </a:lnTo>
+                  <a:lnTo>
+                    <a:pt x="856895" y="1228527"/>
+                  </a:lnTo>
+                  <a:lnTo>
+                    <a:pt x="928518" y="1309022"/>
+                  </a:lnTo>
+                  <a:lnTo>
+                    <a:pt x="1000141" y="1386645"/>
+                  </a:lnTo>
+                  <a:lnTo>
+                    <a:pt x="1071763" y="1461496"/>
+                  </a:lnTo>
+                  <a:lnTo>
+                    <a:pt x="1143386" y="1533676"/>
+                  </a:lnTo>
+                  <a:lnTo>
+                    <a:pt x="1215008" y="1603280"/>
+                  </a:lnTo>
+                  <a:lnTo>
+                    <a:pt x="1286631" y="1670399"/>
+                  </a:lnTo>
+                  <a:lnTo>
+                    <a:pt x="1358253" y="1735122"/>
+                  </a:lnTo>
+                  <a:lnTo>
+                    <a:pt x="1429876" y="1797536"/>
+                  </a:lnTo>
+                  <a:lnTo>
+                    <a:pt x="1501498" y="1857721"/>
+                  </a:lnTo>
+                  <a:lnTo>
+                    <a:pt x="1573121" y="1915759"/>
+                  </a:lnTo>
+                  <a:lnTo>
+                    <a:pt x="1644743" y="1971725"/>
+                  </a:lnTo>
+                  <a:lnTo>
+                    <a:pt x="1716366" y="2025693"/>
+                  </a:lnTo>
+                  <a:lnTo>
+                    <a:pt x="1787988" y="2077735"/>
+                  </a:lnTo>
+                  <a:lnTo>
+                    <a:pt x="1859611" y="2127920"/>
+                  </a:lnTo>
+                  <a:lnTo>
+                    <a:pt x="1931233" y="2176313"/>
+                  </a:lnTo>
+                  <a:lnTo>
+                    <a:pt x="2002856" y="2222979"/>
+                  </a:lnTo>
+                  <a:lnTo>
+                    <a:pt x="2074478" y="2267980"/>
+                  </a:lnTo>
+                  <a:lnTo>
+                    <a:pt x="2146101" y="2311374"/>
+                  </a:lnTo>
+                  <a:lnTo>
+                    <a:pt x="2217723" y="2353219"/>
+                  </a:lnTo>
+                  <a:lnTo>
+                    <a:pt x="2289346" y="2393571"/>
+                  </a:lnTo>
+                  <a:lnTo>
+                    <a:pt x="2360969" y="2432482"/>
+                  </a:lnTo>
+                  <a:lnTo>
+                    <a:pt x="2432591" y="2470005"/>
+                  </a:lnTo>
+                  <a:lnTo>
+                    <a:pt x="2504214" y="2506188"/>
+                  </a:lnTo>
+                  <a:lnTo>
+                    <a:pt x="2575836" y="2541080"/>
+                  </a:lnTo>
+                  <a:lnTo>
+                    <a:pt x="2647459" y="2574726"/>
+                  </a:lnTo>
+                  <a:lnTo>
+                    <a:pt x="2719081" y="2607172"/>
+                  </a:lnTo>
+                  <a:lnTo>
+                    <a:pt x="2790704" y="2638459"/>
+                  </a:lnTo>
+                  <a:lnTo>
+                    <a:pt x="2862326" y="2654253"/>
+                  </a:lnTo>
+                  <a:lnTo>
+                    <a:pt x="2933949" y="2654191"/>
+                  </a:lnTo>
+                  <a:lnTo>
+                    <a:pt x="3005571" y="2654129"/>
+                  </a:lnTo>
+                  <a:lnTo>
+                    <a:pt x="3077194" y="2654067"/>
+                  </a:lnTo>
+                  <a:lnTo>
+                    <a:pt x="3148816" y="2654005"/>
+                  </a:lnTo>
+                  <a:lnTo>
+                    <a:pt x="3220439" y="2653943"/>
+                  </a:lnTo>
+                  <a:lnTo>
+                    <a:pt x="3292061" y="2653881"/>
+                  </a:lnTo>
+                  <a:lnTo>
+                    <a:pt x="3363684" y="2653820"/>
+                  </a:lnTo>
+                  <a:lnTo>
+                    <a:pt x="3435306" y="2653758"/>
+                  </a:lnTo>
+                  <a:lnTo>
+                    <a:pt x="3506929" y="2653696"/>
+                  </a:lnTo>
+                  <a:lnTo>
+                    <a:pt x="3578551" y="2653634"/>
+                  </a:lnTo>
+                  <a:lnTo>
+                    <a:pt x="3650174" y="2653572"/>
+                  </a:lnTo>
+                  <a:lnTo>
+                    <a:pt x="3721797" y="2653510"/>
+                  </a:lnTo>
+                  <a:lnTo>
+                    <a:pt x="3793419" y="2653448"/>
+                  </a:lnTo>
+                  <a:lnTo>
+                    <a:pt x="3865042" y="2653386"/>
+                  </a:lnTo>
+                  <a:lnTo>
+                    <a:pt x="3936664" y="2653324"/>
+                  </a:lnTo>
+                  <a:lnTo>
+                    <a:pt x="4008287" y="2653262"/>
+                  </a:lnTo>
+                  <a:lnTo>
+                    <a:pt x="4079909" y="2653200"/>
+                  </a:lnTo>
+                  <a:lnTo>
+                    <a:pt x="4151532" y="2653138"/>
+                  </a:lnTo>
+                  <a:lnTo>
+                    <a:pt x="4223154" y="2653076"/>
+                  </a:lnTo>
+                  <a:lnTo>
+                    <a:pt x="4294777" y="2653014"/>
+                  </a:lnTo>
+                  <a:lnTo>
+                    <a:pt x="4366399" y="2652952"/>
+                  </a:lnTo>
+                  <a:lnTo>
+                    <a:pt x="4438022" y="2652890"/>
+                  </a:lnTo>
+                  <a:lnTo>
+                    <a:pt x="4509644" y="2652828"/>
+                  </a:lnTo>
+                  <a:lnTo>
+                    <a:pt x="4581267" y="2652766"/>
+                  </a:lnTo>
+                  <a:lnTo>
+                    <a:pt x="4652889" y="2652703"/>
+                  </a:lnTo>
+                  <a:lnTo>
+                    <a:pt x="4724512" y="2652641"/>
+                  </a:lnTo>
+                  <a:lnTo>
+                    <a:pt x="4796134" y="2652579"/>
+                  </a:lnTo>
+                  <a:lnTo>
+                    <a:pt x="4867757" y="2652517"/>
+                  </a:lnTo>
+                  <a:lnTo>
+                    <a:pt x="4939379" y="2652455"/>
+                  </a:lnTo>
+                  <a:lnTo>
+                    <a:pt x="5011002" y="2652393"/>
+                  </a:lnTo>
+                  <a:lnTo>
+                    <a:pt x="5082625" y="2652331"/>
+                  </a:lnTo>
+                  <a:lnTo>
+                    <a:pt x="5154247" y="2652269"/>
+                  </a:lnTo>
+                  <a:lnTo>
+                    <a:pt x="5225870" y="2652207"/>
+                  </a:lnTo>
+                  <a:lnTo>
+                    <a:pt x="5297492" y="2652145"/>
                   </a:lnTo>
                 </a:path>
               </a:pathLst>
@@ -3722,312 +3722,312 @@
           </p:nvSpPr>
           <p:spPr>
             <a:xfrm>
-              <a:off x="1172049" y="4700746"/>
-              <a:ext cx="7090630" cy="621870"/>
+              <a:off x="1172049" y="4727818"/>
+              <a:ext cx="7090630" cy="592543"/>
             </a:xfrm>
             <a:custGeom>
               <a:avLst/>
               <a:pathLst>
-                <a:path w="7090630" h="621870">
+                <a:path w="7090630" h="592543">
                   <a:moveTo>
-                    <a:pt x="7090630" y="621870"/>
+                    <a:pt x="7090630" y="592543"/>
                   </a:moveTo>
                   <a:lnTo>
-                    <a:pt x="7019007" y="613151"/>
-                  </a:lnTo>
-                  <a:lnTo>
-                    <a:pt x="6947385" y="604109"/>
-                  </a:lnTo>
-                  <a:lnTo>
-                    <a:pt x="6875762" y="594730"/>
-                  </a:lnTo>
-                  <a:lnTo>
-                    <a:pt x="6804139" y="585003"/>
-                  </a:lnTo>
-                  <a:lnTo>
-                    <a:pt x="6732517" y="574914"/>
-                  </a:lnTo>
-                  <a:lnTo>
-                    <a:pt x="6660894" y="564451"/>
-                  </a:lnTo>
-                  <a:lnTo>
-                    <a:pt x="6589272" y="553599"/>
-                  </a:lnTo>
-                  <a:lnTo>
-                    <a:pt x="6517649" y="542343"/>
-                  </a:lnTo>
-                  <a:lnTo>
-                    <a:pt x="6446027" y="530670"/>
-                  </a:lnTo>
-                  <a:lnTo>
-                    <a:pt x="6374404" y="518562"/>
-                  </a:lnTo>
-                  <a:lnTo>
-                    <a:pt x="6302782" y="506005"/>
-                  </a:lnTo>
-                  <a:lnTo>
-                    <a:pt x="6231159" y="492981"/>
-                  </a:lnTo>
-                  <a:lnTo>
-                    <a:pt x="6159537" y="479473"/>
-                  </a:lnTo>
-                  <a:lnTo>
-                    <a:pt x="6087914" y="465463"/>
-                  </a:lnTo>
-                  <a:lnTo>
-                    <a:pt x="6016292" y="450932"/>
-                  </a:lnTo>
-                  <a:lnTo>
-                    <a:pt x="5944669" y="435862"/>
-                  </a:lnTo>
-                  <a:lnTo>
-                    <a:pt x="5873047" y="420232"/>
-                  </a:lnTo>
-                  <a:lnTo>
-                    <a:pt x="5801424" y="404020"/>
-                  </a:lnTo>
-                  <a:lnTo>
-                    <a:pt x="5729802" y="387207"/>
-                  </a:lnTo>
-                  <a:lnTo>
-                    <a:pt x="5658179" y="369768"/>
-                  </a:lnTo>
-                  <a:lnTo>
-                    <a:pt x="5586557" y="351682"/>
-                  </a:lnTo>
-                  <a:lnTo>
-                    <a:pt x="5514934" y="332924"/>
-                  </a:lnTo>
-                  <a:lnTo>
-                    <a:pt x="5443311" y="313468"/>
-                  </a:lnTo>
-                  <a:lnTo>
-                    <a:pt x="5371689" y="293290"/>
-                  </a:lnTo>
-                  <a:lnTo>
-                    <a:pt x="5300066" y="272362"/>
-                  </a:lnTo>
-                  <a:lnTo>
-                    <a:pt x="5228444" y="250656"/>
-                  </a:lnTo>
-                  <a:lnTo>
-                    <a:pt x="5156821" y="228143"/>
-                  </a:lnTo>
-                  <a:lnTo>
-                    <a:pt x="5085199" y="204794"/>
-                  </a:lnTo>
-                  <a:lnTo>
-                    <a:pt x="5013576" y="180578"/>
-                  </a:lnTo>
-                  <a:lnTo>
-                    <a:pt x="4941954" y="155461"/>
-                  </a:lnTo>
-                  <a:lnTo>
-                    <a:pt x="4870331" y="129412"/>
-                  </a:lnTo>
-                  <a:lnTo>
-                    <a:pt x="4798709" y="102394"/>
-                  </a:lnTo>
-                  <a:lnTo>
-                    <a:pt x="4727086" y="74373"/>
-                  </a:lnTo>
-                  <a:lnTo>
-                    <a:pt x="4655464" y="45310"/>
-                  </a:lnTo>
-                  <a:lnTo>
-                    <a:pt x="4583841" y="26878"/>
-                  </a:lnTo>
-                  <a:lnTo>
-                    <a:pt x="4512219" y="26465"/>
-                  </a:lnTo>
-                  <a:lnTo>
-                    <a:pt x="4440596" y="26051"/>
-                  </a:lnTo>
-                  <a:lnTo>
-                    <a:pt x="4368974" y="25637"/>
-                  </a:lnTo>
-                  <a:lnTo>
-                    <a:pt x="4297351" y="25223"/>
-                  </a:lnTo>
-                  <a:lnTo>
-                    <a:pt x="4225729" y="24809"/>
-                  </a:lnTo>
-                  <a:lnTo>
-                    <a:pt x="4154106" y="24394"/>
-                  </a:lnTo>
-                  <a:lnTo>
-                    <a:pt x="4082483" y="23980"/>
-                  </a:lnTo>
-                  <a:lnTo>
-                    <a:pt x="4010861" y="23565"/>
-                  </a:lnTo>
-                  <a:lnTo>
-                    <a:pt x="3939238" y="23150"/>
-                  </a:lnTo>
-                  <a:lnTo>
-                    <a:pt x="3867616" y="22735"/>
-                  </a:lnTo>
-                  <a:lnTo>
-                    <a:pt x="3795993" y="22319"/>
-                  </a:lnTo>
-                  <a:lnTo>
-                    <a:pt x="3724371" y="21903"/>
-                  </a:lnTo>
-                  <a:lnTo>
-                    <a:pt x="3652748" y="21488"/>
-                  </a:lnTo>
-                  <a:lnTo>
-                    <a:pt x="3581126" y="21071"/>
-                  </a:lnTo>
-                  <a:lnTo>
-                    <a:pt x="3509503" y="20655"/>
-                  </a:lnTo>
-                  <a:lnTo>
-                    <a:pt x="3437881" y="20239"/>
-                  </a:lnTo>
-                  <a:lnTo>
-                    <a:pt x="3366258" y="19822"/>
-                  </a:lnTo>
-                  <a:lnTo>
-                    <a:pt x="3294636" y="19405"/>
-                  </a:lnTo>
-                  <a:lnTo>
-                    <a:pt x="3223013" y="18988"/>
-                  </a:lnTo>
-                  <a:lnTo>
-                    <a:pt x="3151391" y="18570"/>
-                  </a:lnTo>
-                  <a:lnTo>
-                    <a:pt x="3079768" y="18153"/>
-                  </a:lnTo>
-                  <a:lnTo>
-                    <a:pt x="3008146" y="17735"/>
-                  </a:lnTo>
-                  <a:lnTo>
-                    <a:pt x="2936523" y="17317"/>
-                  </a:lnTo>
-                  <a:lnTo>
-                    <a:pt x="2864901" y="16899"/>
-                  </a:lnTo>
-                  <a:lnTo>
-                    <a:pt x="2793278" y="16481"/>
-                  </a:lnTo>
-                  <a:lnTo>
-                    <a:pt x="2721655" y="16062"/>
-                  </a:lnTo>
-                  <a:lnTo>
-                    <a:pt x="2650033" y="15643"/>
-                  </a:lnTo>
-                  <a:lnTo>
-                    <a:pt x="2578410" y="15224"/>
-                  </a:lnTo>
-                  <a:lnTo>
-                    <a:pt x="2506788" y="14805"/>
-                  </a:lnTo>
-                  <a:lnTo>
-                    <a:pt x="2435165" y="14385"/>
-                  </a:lnTo>
-                  <a:lnTo>
-                    <a:pt x="2363543" y="13966"/>
-                  </a:lnTo>
-                  <a:lnTo>
-                    <a:pt x="2291920" y="13546"/>
-                  </a:lnTo>
-                  <a:lnTo>
-                    <a:pt x="2220298" y="13126"/>
-                  </a:lnTo>
-                  <a:lnTo>
-                    <a:pt x="2148675" y="12706"/>
-                  </a:lnTo>
-                  <a:lnTo>
-                    <a:pt x="2077053" y="12285"/>
-                  </a:lnTo>
-                  <a:lnTo>
-                    <a:pt x="2005430" y="11864"/>
-                  </a:lnTo>
-                  <a:lnTo>
-                    <a:pt x="1933808" y="11443"/>
-                  </a:lnTo>
-                  <a:lnTo>
-                    <a:pt x="1862185" y="11022"/>
-                  </a:lnTo>
-                  <a:lnTo>
-                    <a:pt x="1790563" y="10601"/>
-                  </a:lnTo>
-                  <a:lnTo>
-                    <a:pt x="1718940" y="10180"/>
-                  </a:lnTo>
-                  <a:lnTo>
-                    <a:pt x="1647318" y="9758"/>
-                  </a:lnTo>
-                  <a:lnTo>
-                    <a:pt x="1575695" y="9336"/>
-                  </a:lnTo>
-                  <a:lnTo>
-                    <a:pt x="1504073" y="8914"/>
-                  </a:lnTo>
-                  <a:lnTo>
-                    <a:pt x="1432450" y="8491"/>
-                  </a:lnTo>
-                  <a:lnTo>
-                    <a:pt x="1360827" y="8069"/>
-                  </a:lnTo>
-                  <a:lnTo>
-                    <a:pt x="1289205" y="7646"/>
-                  </a:lnTo>
-                  <a:lnTo>
-                    <a:pt x="1217582" y="7223"/>
-                  </a:lnTo>
-                  <a:lnTo>
-                    <a:pt x="1145960" y="6800"/>
-                  </a:lnTo>
-                  <a:lnTo>
-                    <a:pt x="1074337" y="6376"/>
-                  </a:lnTo>
-                  <a:lnTo>
-                    <a:pt x="1002715" y="5953"/>
-                  </a:lnTo>
-                  <a:lnTo>
-                    <a:pt x="931092" y="5529"/>
-                  </a:lnTo>
-                  <a:lnTo>
-                    <a:pt x="859470" y="5105"/>
-                  </a:lnTo>
-                  <a:lnTo>
-                    <a:pt x="787847" y="4680"/>
-                  </a:lnTo>
-                  <a:lnTo>
-                    <a:pt x="716225" y="4256"/>
-                  </a:lnTo>
-                  <a:lnTo>
-                    <a:pt x="644602" y="3831"/>
-                  </a:lnTo>
-                  <a:lnTo>
-                    <a:pt x="572980" y="3406"/>
-                  </a:lnTo>
-                  <a:lnTo>
-                    <a:pt x="501357" y="2981"/>
-                  </a:lnTo>
-                  <a:lnTo>
-                    <a:pt x="429735" y="2556"/>
-                  </a:lnTo>
-                  <a:lnTo>
-                    <a:pt x="358112" y="2130"/>
-                  </a:lnTo>
-                  <a:lnTo>
-                    <a:pt x="286490" y="1705"/>
-                  </a:lnTo>
-                  <a:lnTo>
-                    <a:pt x="214867" y="1279"/>
-                  </a:lnTo>
-                  <a:lnTo>
-                    <a:pt x="143245" y="852"/>
-                  </a:lnTo>
-                  <a:lnTo>
-                    <a:pt x="71622" y="426"/>
-                  </a:lnTo>
-                  <a:lnTo>
-                    <a:pt x="0" y="0"/>
+                    <a:pt x="7019007" y="583775"/>
+                  </a:lnTo>
+                  <a:lnTo>
+                    <a:pt x="6947385" y="574682"/>
+                  </a:lnTo>
+                  <a:lnTo>
+                    <a:pt x="6875762" y="565253"/>
+                  </a:lnTo>
+                  <a:lnTo>
+                    <a:pt x="6804139" y="555475"/>
+                  </a:lnTo>
+                  <a:lnTo>
+                    <a:pt x="6732517" y="545334"/>
+                  </a:lnTo>
+                  <a:lnTo>
+                    <a:pt x="6660894" y="534819"/>
+                  </a:lnTo>
+                  <a:lnTo>
+                    <a:pt x="6589272" y="523914"/>
+                  </a:lnTo>
+                  <a:lnTo>
+                    <a:pt x="6517649" y="512606"/>
+                  </a:lnTo>
+                  <a:lnTo>
+                    <a:pt x="6446027" y="500879"/>
+                  </a:lnTo>
+                  <a:lnTo>
+                    <a:pt x="6374404" y="488718"/>
+                  </a:lnTo>
+                  <a:lnTo>
+                    <a:pt x="6302782" y="476107"/>
+                  </a:lnTo>
+                  <a:lnTo>
+                    <a:pt x="6231159" y="463029"/>
+                  </a:lnTo>
+                  <a:lnTo>
+                    <a:pt x="6159537" y="449467"/>
+                  </a:lnTo>
+                  <a:lnTo>
+                    <a:pt x="6087914" y="435403"/>
+                  </a:lnTo>
+                  <a:lnTo>
+                    <a:pt x="6016292" y="420818"/>
+                  </a:lnTo>
+                  <a:lnTo>
+                    <a:pt x="5944669" y="405694"/>
+                  </a:lnTo>
+                  <a:lnTo>
+                    <a:pt x="5873047" y="390010"/>
+                  </a:lnTo>
+                  <a:lnTo>
+                    <a:pt x="5801424" y="373745"/>
+                  </a:lnTo>
+                  <a:lnTo>
+                    <a:pt x="5729802" y="356878"/>
+                  </a:lnTo>
+                  <a:lnTo>
+                    <a:pt x="5658179" y="339387"/>
+                  </a:lnTo>
+                  <a:lnTo>
+                    <a:pt x="5586557" y="321249"/>
+                  </a:lnTo>
+                  <a:lnTo>
+                    <a:pt x="5514934" y="302439"/>
+                  </a:lnTo>
+                  <a:lnTo>
+                    <a:pt x="5443311" y="282933"/>
+                  </a:lnTo>
+                  <a:lnTo>
+                    <a:pt x="5371689" y="262704"/>
+                  </a:lnTo>
+                  <a:lnTo>
+                    <a:pt x="5300066" y="241728"/>
+                  </a:lnTo>
+                  <a:lnTo>
+                    <a:pt x="5228444" y="219974"/>
+                  </a:lnTo>
+                  <a:lnTo>
+                    <a:pt x="5156821" y="197416"/>
+                  </a:lnTo>
+                  <a:lnTo>
+                    <a:pt x="5085199" y="174023"/>
+                  </a:lnTo>
+                  <a:lnTo>
+                    <a:pt x="5013576" y="149763"/>
+                  </a:lnTo>
+                  <a:lnTo>
+                    <a:pt x="4941954" y="124606"/>
+                  </a:lnTo>
+                  <a:lnTo>
+                    <a:pt x="4870331" y="98518"/>
+                  </a:lnTo>
+                  <a:lnTo>
+                    <a:pt x="4798709" y="71464"/>
+                  </a:lnTo>
+                  <a:lnTo>
+                    <a:pt x="4727086" y="43408"/>
+                  </a:lnTo>
+                  <a:lnTo>
+                    <a:pt x="4655464" y="14315"/>
+                  </a:lnTo>
+                  <a:lnTo>
+                    <a:pt x="4583841" y="0"/>
+                  </a:lnTo>
+                  <a:lnTo>
+                    <a:pt x="4512219" y="61"/>
+                  </a:lnTo>
+                  <a:lnTo>
+                    <a:pt x="4440596" y="123"/>
+                  </a:lnTo>
+                  <a:lnTo>
+                    <a:pt x="4368974" y="185"/>
+                  </a:lnTo>
+                  <a:lnTo>
+                    <a:pt x="4297351" y="247"/>
+                  </a:lnTo>
+                  <a:lnTo>
+                    <a:pt x="4225729" y="309"/>
+                  </a:lnTo>
+                  <a:lnTo>
+                    <a:pt x="4154106" y="371"/>
+                  </a:lnTo>
+                  <a:lnTo>
+                    <a:pt x="4082483" y="433"/>
+                  </a:lnTo>
+                  <a:lnTo>
+                    <a:pt x="4010861" y="495"/>
+                  </a:lnTo>
+                  <a:lnTo>
+                    <a:pt x="3939238" y="557"/>
+                  </a:lnTo>
+                  <a:lnTo>
+                    <a:pt x="3867616" y="618"/>
+                  </a:lnTo>
+                  <a:lnTo>
+                    <a:pt x="3795993" y="680"/>
+                  </a:lnTo>
+                  <a:lnTo>
+                    <a:pt x="3724371" y="742"/>
+                  </a:lnTo>
+                  <a:lnTo>
+                    <a:pt x="3652748" y="804"/>
+                  </a:lnTo>
+                  <a:lnTo>
+                    <a:pt x="3581126" y="866"/>
+                  </a:lnTo>
+                  <a:lnTo>
+                    <a:pt x="3509503" y="928"/>
+                  </a:lnTo>
+                  <a:lnTo>
+                    <a:pt x="3437881" y="990"/>
+                  </a:lnTo>
+                  <a:lnTo>
+                    <a:pt x="3366258" y="1052"/>
+                  </a:lnTo>
+                  <a:lnTo>
+                    <a:pt x="3294636" y="1113"/>
+                  </a:lnTo>
+                  <a:lnTo>
+                    <a:pt x="3223013" y="1175"/>
+                  </a:lnTo>
+                  <a:lnTo>
+                    <a:pt x="3151391" y="1237"/>
+                  </a:lnTo>
+                  <a:lnTo>
+                    <a:pt x="3079768" y="1299"/>
+                  </a:lnTo>
+                  <a:lnTo>
+                    <a:pt x="3008146" y="1361"/>
+                  </a:lnTo>
+                  <a:lnTo>
+                    <a:pt x="2936523" y="1423"/>
+                  </a:lnTo>
+                  <a:lnTo>
+                    <a:pt x="2864901" y="1484"/>
+                  </a:lnTo>
+                  <a:lnTo>
+                    <a:pt x="2793278" y="1546"/>
+                  </a:lnTo>
+                  <a:lnTo>
+                    <a:pt x="2721655" y="1608"/>
+                  </a:lnTo>
+                  <a:lnTo>
+                    <a:pt x="2650033" y="1670"/>
+                  </a:lnTo>
+                  <a:lnTo>
+                    <a:pt x="2578410" y="1732"/>
+                  </a:lnTo>
+                  <a:lnTo>
+                    <a:pt x="2506788" y="1793"/>
+                  </a:lnTo>
+                  <a:lnTo>
+                    <a:pt x="2435165" y="1855"/>
+                  </a:lnTo>
+                  <a:lnTo>
+                    <a:pt x="2363543" y="1917"/>
+                  </a:lnTo>
+                  <a:lnTo>
+                    <a:pt x="2291920" y="1979"/>
+                  </a:lnTo>
+                  <a:lnTo>
+                    <a:pt x="2220298" y="2040"/>
+                  </a:lnTo>
+                  <a:lnTo>
+                    <a:pt x="2148675" y="2102"/>
+                  </a:lnTo>
+                  <a:lnTo>
+                    <a:pt x="2077053" y="2164"/>
+                  </a:lnTo>
+                  <a:lnTo>
+                    <a:pt x="2005430" y="2226"/>
+                  </a:lnTo>
+                  <a:lnTo>
+                    <a:pt x="1933808" y="2287"/>
+                  </a:lnTo>
+                  <a:lnTo>
+                    <a:pt x="1862185" y="2349"/>
+                  </a:lnTo>
+                  <a:lnTo>
+                    <a:pt x="1790563" y="2411"/>
+                  </a:lnTo>
+                  <a:lnTo>
+                    <a:pt x="1718940" y="2473"/>
+                  </a:lnTo>
+                  <a:lnTo>
+                    <a:pt x="1647318" y="2534"/>
+                  </a:lnTo>
+                  <a:lnTo>
+                    <a:pt x="1575695" y="2596"/>
+                  </a:lnTo>
+                  <a:lnTo>
+                    <a:pt x="1504073" y="2658"/>
+                  </a:lnTo>
+                  <a:lnTo>
+                    <a:pt x="1432450" y="2720"/>
+                  </a:lnTo>
+                  <a:lnTo>
+                    <a:pt x="1360827" y="2781"/>
+                  </a:lnTo>
+                  <a:lnTo>
+                    <a:pt x="1289205" y="2843"/>
+                  </a:lnTo>
+                  <a:lnTo>
+                    <a:pt x="1217582" y="2905"/>
+                  </a:lnTo>
+                  <a:lnTo>
+                    <a:pt x="1145960" y="2966"/>
+                  </a:lnTo>
+                  <a:lnTo>
+                    <a:pt x="1074337" y="3028"/>
+                  </a:lnTo>
+                  <a:lnTo>
+                    <a:pt x="1002715" y="3090"/>
+                  </a:lnTo>
+                  <a:lnTo>
+                    <a:pt x="931092" y="3152"/>
+                  </a:lnTo>
+                  <a:lnTo>
+                    <a:pt x="859470" y="3213"/>
+                  </a:lnTo>
+                  <a:lnTo>
+                    <a:pt x="787847" y="3275"/>
+                  </a:lnTo>
+                  <a:lnTo>
+                    <a:pt x="716225" y="3337"/>
+                  </a:lnTo>
+                  <a:lnTo>
+                    <a:pt x="644602" y="3398"/>
+                  </a:lnTo>
+                  <a:lnTo>
+                    <a:pt x="572980" y="3460"/>
+                  </a:lnTo>
+                  <a:lnTo>
+                    <a:pt x="501357" y="3522"/>
+                  </a:lnTo>
+                  <a:lnTo>
+                    <a:pt x="429735" y="3583"/>
+                  </a:lnTo>
+                  <a:lnTo>
+                    <a:pt x="358112" y="3645"/>
+                  </a:lnTo>
+                  <a:lnTo>
+                    <a:pt x="286490" y="3707"/>
+                  </a:lnTo>
+                  <a:lnTo>
+                    <a:pt x="214867" y="3768"/>
+                  </a:lnTo>
+                  <a:lnTo>
+                    <a:pt x="143245" y="3830"/>
+                  </a:lnTo>
+                  <a:lnTo>
+                    <a:pt x="71622" y="3891"/>
+                  </a:lnTo>
+                  <a:lnTo>
+                    <a:pt x="0" y="3953"/>
                   </a:lnTo>
                 </a:path>
               </a:pathLst>
@@ -4047,312 +4047,312 @@
           </p:nvSpPr>
           <p:spPr>
             <a:xfrm>
-              <a:off x="1172049" y="2828936"/>
-              <a:ext cx="7090630" cy="2290943"/>
+              <a:off x="1172049" y="2884474"/>
+              <a:ext cx="7090630" cy="2228932"/>
             </a:xfrm>
             <a:custGeom>
               <a:avLst/>
               <a:pathLst>
-                <a:path w="7090630" h="2290943">
+                <a:path w="7090630" h="2228932">
                   <a:moveTo>
                     <a:pt x="0" y="0"/>
                   </a:moveTo>
                   <a:lnTo>
-                    <a:pt x="71622" y="49987"/>
-                  </a:lnTo>
-                  <a:lnTo>
-                    <a:pt x="143245" y="99058"/>
-                  </a:lnTo>
-                  <a:lnTo>
-                    <a:pt x="214867" y="147230"/>
-                  </a:lnTo>
-                  <a:lnTo>
-                    <a:pt x="286490" y="194519"/>
-                  </a:lnTo>
-                  <a:lnTo>
-                    <a:pt x="358112" y="240943"/>
-                  </a:lnTo>
-                  <a:lnTo>
-                    <a:pt x="429735" y="286515"/>
-                  </a:lnTo>
-                  <a:lnTo>
-                    <a:pt x="501357" y="331253"/>
-                  </a:lnTo>
-                  <a:lnTo>
-                    <a:pt x="572980" y="375171"/>
-                  </a:lnTo>
-                  <a:lnTo>
-                    <a:pt x="644602" y="418284"/>
-                  </a:lnTo>
-                  <a:lnTo>
-                    <a:pt x="716225" y="460608"/>
-                  </a:lnTo>
-                  <a:lnTo>
-                    <a:pt x="787847" y="502156"/>
-                  </a:lnTo>
-                  <a:lnTo>
-                    <a:pt x="859470" y="542942"/>
-                  </a:lnTo>
-                  <a:lnTo>
-                    <a:pt x="931092" y="582982"/>
-                  </a:lnTo>
-                  <a:lnTo>
-                    <a:pt x="1002715" y="622288"/>
-                  </a:lnTo>
-                  <a:lnTo>
-                    <a:pt x="1074337" y="660873"/>
-                  </a:lnTo>
-                  <a:lnTo>
-                    <a:pt x="1145960" y="698752"/>
-                  </a:lnTo>
-                  <a:lnTo>
-                    <a:pt x="1217582" y="735937"/>
-                  </a:lnTo>
-                  <a:lnTo>
-                    <a:pt x="1289205" y="772440"/>
-                  </a:lnTo>
-                  <a:lnTo>
-                    <a:pt x="1360827" y="808275"/>
-                  </a:lnTo>
-                  <a:lnTo>
-                    <a:pt x="1432450" y="843453"/>
-                  </a:lnTo>
-                  <a:lnTo>
-                    <a:pt x="1504073" y="877987"/>
-                  </a:lnTo>
-                  <a:lnTo>
-                    <a:pt x="1575695" y="911888"/>
-                  </a:lnTo>
-                  <a:lnTo>
-                    <a:pt x="1647318" y="945168"/>
-                  </a:lnTo>
-                  <a:lnTo>
-                    <a:pt x="1718940" y="977838"/>
-                  </a:lnTo>
-                  <a:lnTo>
-                    <a:pt x="1790563" y="1009909"/>
-                  </a:lnTo>
-                  <a:lnTo>
-                    <a:pt x="1862185" y="1041393"/>
-                  </a:lnTo>
-                  <a:lnTo>
-                    <a:pt x="1933808" y="1072300"/>
-                  </a:lnTo>
-                  <a:lnTo>
-                    <a:pt x="2005430" y="1102641"/>
-                  </a:lnTo>
-                  <a:lnTo>
-                    <a:pt x="2077053" y="1132426"/>
-                  </a:lnTo>
-                  <a:lnTo>
-                    <a:pt x="2148675" y="1161665"/>
-                  </a:lnTo>
-                  <a:lnTo>
-                    <a:pt x="2220298" y="1190369"/>
-                  </a:lnTo>
-                  <a:lnTo>
-                    <a:pt x="2291920" y="1218546"/>
-                  </a:lnTo>
-                  <a:lnTo>
-                    <a:pt x="2363543" y="1246208"/>
-                  </a:lnTo>
-                  <a:lnTo>
-                    <a:pt x="2435165" y="1273362"/>
-                  </a:lnTo>
-                  <a:lnTo>
-                    <a:pt x="2506788" y="1300019"/>
-                  </a:lnTo>
-                  <a:lnTo>
-                    <a:pt x="2578410" y="1326188"/>
-                  </a:lnTo>
-                  <a:lnTo>
-                    <a:pt x="2650033" y="1351877"/>
-                  </a:lnTo>
-                  <a:lnTo>
-                    <a:pt x="2721655" y="1377095"/>
-                  </a:lnTo>
-                  <a:lnTo>
-                    <a:pt x="2793278" y="1401852"/>
-                  </a:lnTo>
-                  <a:lnTo>
-                    <a:pt x="2864901" y="1426155"/>
-                  </a:lnTo>
-                  <a:lnTo>
-                    <a:pt x="2936523" y="1450012"/>
-                  </a:lnTo>
-                  <a:lnTo>
-                    <a:pt x="3008146" y="1473433"/>
-                  </a:lnTo>
-                  <a:lnTo>
-                    <a:pt x="3079768" y="1496424"/>
-                  </a:lnTo>
-                  <a:lnTo>
-                    <a:pt x="3151391" y="1518994"/>
-                  </a:lnTo>
-                  <a:lnTo>
-                    <a:pt x="3223013" y="1541151"/>
-                  </a:lnTo>
-                  <a:lnTo>
-                    <a:pt x="3294636" y="1562902"/>
-                  </a:lnTo>
-                  <a:lnTo>
-                    <a:pt x="3366258" y="1584254"/>
-                  </a:lnTo>
-                  <a:lnTo>
-                    <a:pt x="3437881" y="1605215"/>
-                  </a:lnTo>
-                  <a:lnTo>
-                    <a:pt x="3509503" y="1625792"/>
-                  </a:lnTo>
-                  <a:lnTo>
-                    <a:pt x="3581126" y="1645992"/>
-                  </a:lnTo>
-                  <a:lnTo>
-                    <a:pt x="3652748" y="1665822"/>
-                  </a:lnTo>
-                  <a:lnTo>
-                    <a:pt x="3724371" y="1685288"/>
-                  </a:lnTo>
-                  <a:lnTo>
-                    <a:pt x="3795993" y="1704398"/>
-                  </a:lnTo>
-                  <a:lnTo>
-                    <a:pt x="3867616" y="1723158"/>
-                  </a:lnTo>
-                  <a:lnTo>
-                    <a:pt x="3939238" y="1741574"/>
-                  </a:lnTo>
-                  <a:lnTo>
-                    <a:pt x="4010861" y="1759653"/>
-                  </a:lnTo>
-                  <a:lnTo>
-                    <a:pt x="4082483" y="1777400"/>
-                  </a:lnTo>
-                  <a:lnTo>
-                    <a:pt x="4154106" y="1794822"/>
-                  </a:lnTo>
-                  <a:lnTo>
-                    <a:pt x="4225729" y="1811925"/>
-                  </a:lnTo>
-                  <a:lnTo>
-                    <a:pt x="4297351" y="1828715"/>
-                  </a:lnTo>
-                  <a:lnTo>
-                    <a:pt x="4368974" y="1845197"/>
-                  </a:lnTo>
-                  <a:lnTo>
-                    <a:pt x="4440596" y="1861377"/>
-                  </a:lnTo>
-                  <a:lnTo>
-                    <a:pt x="4512219" y="1877261"/>
-                  </a:lnTo>
-                  <a:lnTo>
-                    <a:pt x="4583841" y="1892853"/>
-                  </a:lnTo>
-                  <a:lnTo>
-                    <a:pt x="4655464" y="1908160"/>
-                  </a:lnTo>
-                  <a:lnTo>
-                    <a:pt x="4727086" y="1923187"/>
-                  </a:lnTo>
-                  <a:lnTo>
-                    <a:pt x="4798709" y="1937938"/>
-                  </a:lnTo>
-                  <a:lnTo>
-                    <a:pt x="4870331" y="1952419"/>
-                  </a:lnTo>
-                  <a:lnTo>
-                    <a:pt x="4941954" y="1966635"/>
-                  </a:lnTo>
-                  <a:lnTo>
-                    <a:pt x="5013576" y="1980590"/>
-                  </a:lnTo>
-                  <a:lnTo>
-                    <a:pt x="5085199" y="1994289"/>
-                  </a:lnTo>
-                  <a:lnTo>
-                    <a:pt x="5156821" y="2007738"/>
-                  </a:lnTo>
-                  <a:lnTo>
-                    <a:pt x="5228444" y="2020940"/>
-                  </a:lnTo>
-                  <a:lnTo>
-                    <a:pt x="5300066" y="2033900"/>
-                  </a:lnTo>
-                  <a:lnTo>
-                    <a:pt x="5371689" y="2046623"/>
-                  </a:lnTo>
-                  <a:lnTo>
-                    <a:pt x="5443311" y="2059112"/>
-                  </a:lnTo>
-                  <a:lnTo>
-                    <a:pt x="5514934" y="2071373"/>
-                  </a:lnTo>
-                  <a:lnTo>
-                    <a:pt x="5586557" y="2083409"/>
-                  </a:lnTo>
-                  <a:lnTo>
-                    <a:pt x="5658179" y="2095225"/>
-                  </a:lnTo>
-                  <a:lnTo>
-                    <a:pt x="5729802" y="2106824"/>
-                  </a:lnTo>
-                  <a:lnTo>
-                    <a:pt x="5801424" y="2118211"/>
-                  </a:lnTo>
-                  <a:lnTo>
-                    <a:pt x="5873047" y="2129389"/>
-                  </a:lnTo>
-                  <a:lnTo>
-                    <a:pt x="5944669" y="2140362"/>
-                  </a:lnTo>
-                  <a:lnTo>
-                    <a:pt x="6016292" y="2151134"/>
-                  </a:lnTo>
-                  <a:lnTo>
-                    <a:pt x="6087914" y="2161709"/>
-                  </a:lnTo>
-                  <a:lnTo>
-                    <a:pt x="6159537" y="2172090"/>
-                  </a:lnTo>
-                  <a:lnTo>
-                    <a:pt x="6231159" y="2182281"/>
-                  </a:lnTo>
-                  <a:lnTo>
-                    <a:pt x="6302782" y="2192285"/>
-                  </a:lnTo>
-                  <a:lnTo>
-                    <a:pt x="6374404" y="2202106"/>
-                  </a:lnTo>
-                  <a:lnTo>
-                    <a:pt x="6446027" y="2211747"/>
-                  </a:lnTo>
-                  <a:lnTo>
-                    <a:pt x="6517649" y="2221211"/>
-                  </a:lnTo>
-                  <a:lnTo>
-                    <a:pt x="6589272" y="2230502"/>
-                  </a:lnTo>
-                  <a:lnTo>
-                    <a:pt x="6660894" y="2239623"/>
-                  </a:lnTo>
-                  <a:lnTo>
-                    <a:pt x="6732517" y="2248577"/>
-                  </a:lnTo>
-                  <a:lnTo>
-                    <a:pt x="6804139" y="2257366"/>
-                  </a:lnTo>
-                  <a:lnTo>
-                    <a:pt x="6875762" y="2265995"/>
-                  </a:lnTo>
-                  <a:lnTo>
-                    <a:pt x="6947385" y="2274465"/>
-                  </a:lnTo>
-                  <a:lnTo>
-                    <a:pt x="7019007" y="2282780"/>
-                  </a:lnTo>
-                  <a:lnTo>
-                    <a:pt x="7090630" y="2290943"/>
+                    <a:pt x="71622" y="48034"/>
+                  </a:lnTo>
+                  <a:lnTo>
+                    <a:pt x="143245" y="95206"/>
+                  </a:lnTo>
+                  <a:lnTo>
+                    <a:pt x="214867" y="141530"/>
+                  </a:lnTo>
+                  <a:lnTo>
+                    <a:pt x="286490" y="187021"/>
+                  </a:lnTo>
+                  <a:lnTo>
+                    <a:pt x="358112" y="231695"/>
+                  </a:lnTo>
+                  <a:lnTo>
+                    <a:pt x="429735" y="275566"/>
+                  </a:lnTo>
+                  <a:lnTo>
+                    <a:pt x="501357" y="318648"/>
+                  </a:lnTo>
+                  <a:lnTo>
+                    <a:pt x="572980" y="360957"/>
+                  </a:lnTo>
+                  <a:lnTo>
+                    <a:pt x="644602" y="402504"/>
+                  </a:lnTo>
+                  <a:lnTo>
+                    <a:pt x="716225" y="443305"/>
+                  </a:lnTo>
+                  <a:lnTo>
+                    <a:pt x="787847" y="483373"/>
+                  </a:lnTo>
+                  <a:lnTo>
+                    <a:pt x="859470" y="522721"/>
+                  </a:lnTo>
+                  <a:lnTo>
+                    <a:pt x="931092" y="561362"/>
+                  </a:lnTo>
+                  <a:lnTo>
+                    <a:pt x="1002715" y="599308"/>
+                  </a:lnTo>
+                  <a:lnTo>
+                    <a:pt x="1074337" y="636572"/>
+                  </a:lnTo>
+                  <a:lnTo>
+                    <a:pt x="1145960" y="673166"/>
+                  </a:lnTo>
+                  <a:lnTo>
+                    <a:pt x="1217582" y="709103"/>
+                  </a:lnTo>
+                  <a:lnTo>
+                    <a:pt x="1289205" y="744394"/>
+                  </a:lnTo>
+                  <a:lnTo>
+                    <a:pt x="1360827" y="779051"/>
+                  </a:lnTo>
+                  <a:lnTo>
+                    <a:pt x="1432450" y="813085"/>
+                  </a:lnTo>
+                  <a:lnTo>
+                    <a:pt x="1504073" y="846507"/>
+                  </a:lnTo>
+                  <a:lnTo>
+                    <a:pt x="1575695" y="879329"/>
+                  </a:lnTo>
+                  <a:lnTo>
+                    <a:pt x="1647318" y="911560"/>
+                  </a:lnTo>
+                  <a:lnTo>
+                    <a:pt x="1718940" y="943213"/>
+                  </a:lnTo>
+                  <a:lnTo>
+                    <a:pt x="1790563" y="974296"/>
+                  </a:lnTo>
+                  <a:lnTo>
+                    <a:pt x="1862185" y="1004821"/>
+                  </a:lnTo>
+                  <a:lnTo>
+                    <a:pt x="1933808" y="1034797"/>
+                  </a:lnTo>
+                  <a:lnTo>
+                    <a:pt x="2005430" y="1064235"/>
+                  </a:lnTo>
+                  <a:lnTo>
+                    <a:pt x="2077053" y="1093144"/>
+                  </a:lnTo>
+                  <a:lnTo>
+                    <a:pt x="2148675" y="1121533"/>
+                  </a:lnTo>
+                  <a:lnTo>
+                    <a:pt x="2220298" y="1149411"/>
+                  </a:lnTo>
+                  <a:lnTo>
+                    <a:pt x="2291920" y="1176789"/>
+                  </a:lnTo>
+                  <a:lnTo>
+                    <a:pt x="2363543" y="1203675"/>
+                  </a:lnTo>
+                  <a:lnTo>
+                    <a:pt x="2435165" y="1230077"/>
+                  </a:lnTo>
+                  <a:lnTo>
+                    <a:pt x="2506788" y="1256006"/>
+                  </a:lnTo>
+                  <a:lnTo>
+                    <a:pt x="2578410" y="1281468"/>
+                  </a:lnTo>
+                  <a:lnTo>
+                    <a:pt x="2650033" y="1306472"/>
+                  </a:lnTo>
+                  <a:lnTo>
+                    <a:pt x="2721655" y="1331027"/>
+                  </a:lnTo>
+                  <a:lnTo>
+                    <a:pt x="2793278" y="1355141"/>
+                  </a:lnTo>
+                  <a:lnTo>
+                    <a:pt x="2864901" y="1378821"/>
+                  </a:lnTo>
+                  <a:lnTo>
+                    <a:pt x="2936523" y="1402076"/>
+                  </a:lnTo>
+                  <a:lnTo>
+                    <a:pt x="3008146" y="1424913"/>
+                  </a:lnTo>
+                  <a:lnTo>
+                    <a:pt x="3079768" y="1447340"/>
+                  </a:lnTo>
+                  <a:lnTo>
+                    <a:pt x="3151391" y="1469363"/>
+                  </a:lnTo>
+                  <a:lnTo>
+                    <a:pt x="3223013" y="1490991"/>
+                  </a:lnTo>
+                  <a:lnTo>
+                    <a:pt x="3294636" y="1512230"/>
+                  </a:lnTo>
+                  <a:lnTo>
+                    <a:pt x="3366258" y="1533087"/>
+                  </a:lnTo>
+                  <a:lnTo>
+                    <a:pt x="3437881" y="1553569"/>
+                  </a:lnTo>
+                  <a:lnTo>
+                    <a:pt x="3509503" y="1573683"/>
+                  </a:lnTo>
+                  <a:lnTo>
+                    <a:pt x="3581126" y="1593436"/>
+                  </a:lnTo>
+                  <a:lnTo>
+                    <a:pt x="3652748" y="1612834"/>
+                  </a:lnTo>
+                  <a:lnTo>
+                    <a:pt x="3724371" y="1631883"/>
+                  </a:lnTo>
+                  <a:lnTo>
+                    <a:pt x="3795993" y="1650590"/>
+                  </a:lnTo>
+                  <a:lnTo>
+                    <a:pt x="3867616" y="1668961"/>
+                  </a:lnTo>
+                  <a:lnTo>
+                    <a:pt x="3939238" y="1687001"/>
+                  </a:lnTo>
+                  <a:lnTo>
+                    <a:pt x="4010861" y="1704717"/>
+                  </a:lnTo>
+                  <a:lnTo>
+                    <a:pt x="4082483" y="1722115"/>
+                  </a:lnTo>
+                  <a:lnTo>
+                    <a:pt x="4154106" y="1739200"/>
+                  </a:lnTo>
+                  <a:lnTo>
+                    <a:pt x="4225729" y="1755978"/>
+                  </a:lnTo>
+                  <a:lnTo>
+                    <a:pt x="4297351" y="1772455"/>
+                  </a:lnTo>
+                  <a:lnTo>
+                    <a:pt x="4368974" y="1788636"/>
+                  </a:lnTo>
+                  <a:lnTo>
+                    <a:pt x="4440596" y="1804525"/>
+                  </a:lnTo>
+                  <a:lnTo>
+                    <a:pt x="4512219" y="1820129"/>
+                  </a:lnTo>
+                  <a:lnTo>
+                    <a:pt x="4583841" y="1835453"/>
+                  </a:lnTo>
+                  <a:lnTo>
+                    <a:pt x="4655464" y="1850501"/>
+                  </a:lnTo>
+                  <a:lnTo>
+                    <a:pt x="4727086" y="1865279"/>
+                  </a:lnTo>
+                  <a:lnTo>
+                    <a:pt x="4798709" y="1879791"/>
+                  </a:lnTo>
+                  <a:lnTo>
+                    <a:pt x="4870331" y="1894043"/>
+                  </a:lnTo>
+                  <a:lnTo>
+                    <a:pt x="4941954" y="1908038"/>
+                  </a:lnTo>
+                  <a:lnTo>
+                    <a:pt x="5013576" y="1921782"/>
+                  </a:lnTo>
+                  <a:lnTo>
+                    <a:pt x="5085199" y="1935279"/>
+                  </a:lnTo>
+                  <a:lnTo>
+                    <a:pt x="5156821" y="1948533"/>
+                  </a:lnTo>
+                  <a:lnTo>
+                    <a:pt x="5228444" y="1961549"/>
+                  </a:lnTo>
+                  <a:lnTo>
+                    <a:pt x="5300066" y="1974331"/>
+                  </a:lnTo>
+                  <a:lnTo>
+                    <a:pt x="5371689" y="1986883"/>
+                  </a:lnTo>
+                  <a:lnTo>
+                    <a:pt x="5443311" y="1999210"/>
+                  </a:lnTo>
+                  <a:lnTo>
+                    <a:pt x="5514934" y="2011315"/>
+                  </a:lnTo>
+                  <a:lnTo>
+                    <a:pt x="5586557" y="2023203"/>
+                  </a:lnTo>
+                  <a:lnTo>
+                    <a:pt x="5658179" y="2034877"/>
+                  </a:lnTo>
+                  <a:lnTo>
+                    <a:pt x="5729802" y="2046341"/>
+                  </a:lnTo>
+                  <a:lnTo>
+                    <a:pt x="5801424" y="2057600"/>
+                  </a:lnTo>
+                  <a:lnTo>
+                    <a:pt x="5873047" y="2068655"/>
+                  </a:lnTo>
+                  <a:lnTo>
+                    <a:pt x="5944669" y="2079513"/>
+                  </a:lnTo>
+                  <a:lnTo>
+                    <a:pt x="6016292" y="2090175"/>
+                  </a:lnTo>
+                  <a:lnTo>
+                    <a:pt x="6087914" y="2100645"/>
+                  </a:lnTo>
+                  <a:lnTo>
+                    <a:pt x="6159537" y="2110927"/>
+                  </a:lnTo>
+                  <a:lnTo>
+                    <a:pt x="6231159" y="2121025"/>
+                  </a:lnTo>
+                  <a:lnTo>
+                    <a:pt x="6302782" y="2130941"/>
+                  </a:lnTo>
+                  <a:lnTo>
+                    <a:pt x="6374404" y="2140679"/>
+                  </a:lnTo>
+                  <a:lnTo>
+                    <a:pt x="6446027" y="2150241"/>
+                  </a:lnTo>
+                  <a:lnTo>
+                    <a:pt x="6517649" y="2159632"/>
+                  </a:lnTo>
+                  <a:lnTo>
+                    <a:pt x="6589272" y="2168855"/>
+                  </a:lnTo>
+                  <a:lnTo>
+                    <a:pt x="6660894" y="2177911"/>
+                  </a:lnTo>
+                  <a:lnTo>
+                    <a:pt x="6732517" y="2186805"/>
+                  </a:lnTo>
+                  <a:lnTo>
+                    <a:pt x="6804139" y="2195538"/>
+                  </a:lnTo>
+                  <a:lnTo>
+                    <a:pt x="6875762" y="2204115"/>
+                  </a:lnTo>
+                  <a:lnTo>
+                    <a:pt x="6947385" y="2212538"/>
+                  </a:lnTo>
+                  <a:lnTo>
+                    <a:pt x="7019007" y="2220809"/>
+                  </a:lnTo>
+                  <a:lnTo>
+                    <a:pt x="7090630" y="2228932"/>
                   </a:lnTo>
                 </a:path>
               </a:pathLst>
@@ -4424,7 +4424,7 @@
           </p:nvSpPr>
           <p:spPr>
             <a:xfrm>
-              <a:off x="5783789" y="2073503"/>
+              <a:off x="5793129" y="2073503"/>
               <a:ext cx="0" cy="3649639"/>
             </a:xfrm>
             <a:custGeom>
@@ -4467,7 +4467,7 @@
           </p:nvSpPr>
           <p:spPr>
             <a:xfrm>
-              <a:off x="4658599" y="2073503"/>
+              <a:off x="4667548" y="2073503"/>
               <a:ext cx="0" cy="3649639"/>
             </a:xfrm>
             <a:custGeom>
@@ -4510,7 +4510,7 @@
           </p:nvSpPr>
           <p:spPr>
             <a:xfrm>
-              <a:off x="6864197" y="2073503"/>
+              <a:off x="6868063" y="2073503"/>
               <a:ext cx="0" cy="3649639"/>
             </a:xfrm>
             <a:custGeom>
@@ -4783,7 +4783,7 @@
           </p:nvSpPr>
           <p:spPr>
             <a:xfrm>
-              <a:off x="3120823" y="5785772"/>
+              <a:off x="3120990" y="5785772"/>
               <a:ext cx="161574" cy="80101"/>
             </a:xfrm>
             <a:prstGeom prst="rect">
@@ -4829,7 +4829,7 @@
           </p:nvSpPr>
           <p:spPr>
             <a:xfrm>
-              <a:off x="5688698" y="5785772"/>
+              <a:off x="5688107" y="5785772"/>
               <a:ext cx="62179" cy="80101"/>
             </a:xfrm>
             <a:prstGeom prst="rect">
@@ -4875,7 +4875,7 @@
           </p:nvSpPr>
           <p:spPr>
             <a:xfrm>
-              <a:off x="8175787" y="5785772"/>
+              <a:off x="8174437" y="5785772"/>
               <a:ext cx="124358" cy="80101"/>
             </a:xfrm>
             <a:prstGeom prst="rect">
@@ -5046,7 +5046,7 @@
                   <a:latin typeface="Helvetica"/>
                   <a:cs typeface="Helvetica"/>
                 </a:rPr>
-                <a:t>subHR per 10 mL/min decline: 1.30 (1.01-1.67), p_Bonf = 0.264 (n = 6)  |  per IQR decline (Δ = 21.9): 1.77 (1.02-3.08)  |  IQR: [-10.5, 11.4]</a:t>
+                <a:t>subHR per 10 mL/min decline: 1.29 (1.00-1.67), p_Bonf = 0.306 (n = 6)  |  per IQR decline (Δ = 21.9): 1.75 (1.00-3.05)  |  IQR: [-10.4, 11.4]</a:t>
               </a:r>
             </a:p>
           </p:txBody>
